--- a/Präsi/AI_Anamnesis.pptx
+++ b/Präsi/AI_Anamnesis.pptx
@@ -258,11 +258,11 @@
         </c:ser>
         <c:gapWidth val="60"/>
         <c:overlap val="0"/>
-        <c:axId val="92052642"/>
-        <c:axId val="67452830"/>
+        <c:axId val="84304577"/>
+        <c:axId val="37491834"/>
       </c:barChart>
       <c:catAx>
-        <c:axId val="92052642"/>
+        <c:axId val="84304577"/>
         <c:scaling>
           <c:orientation val="minMax"/>
         </c:scaling>
@@ -296,7 +296,7 @@
             </a:pPr>
           </a:p>
         </c:txPr>
-        <c:crossAx val="67452830"/>
+        <c:crossAx val="37491834"/>
         <c:crosses val="autoZero"/>
         <c:auto val="1"/>
         <c:lblAlgn val="ctr"/>
@@ -304,7 +304,7 @@
         <c:noMultiLvlLbl val="0"/>
       </c:catAx>
       <c:valAx>
-        <c:axId val="67452830"/>
+        <c:axId val="37491834"/>
         <c:scaling>
           <c:orientation val="minMax"/>
           <c:max val="16"/>
@@ -349,7 +349,7 @@
             </a:pPr>
           </a:p>
         </c:txPr>
-        <c:crossAx val="92052642"/>
+        <c:crossAx val="84304577"/>
         <c:crosses val="autoZero"/>
         <c:crossBetween val="between"/>
       </c:valAx>
@@ -641,11 +641,11 @@
         </c:ser>
         <c:gapWidth val="60"/>
         <c:overlap val="0"/>
-        <c:axId val="50777322"/>
-        <c:axId val="26724966"/>
+        <c:axId val="82769449"/>
+        <c:axId val="67986541"/>
       </c:barChart>
       <c:catAx>
-        <c:axId val="50777322"/>
+        <c:axId val="82769449"/>
         <c:scaling>
           <c:orientation val="minMax"/>
         </c:scaling>
@@ -679,7 +679,7 @@
             </a:pPr>
           </a:p>
         </c:txPr>
-        <c:crossAx val="26724966"/>
+        <c:crossAx val="67986541"/>
         <c:crosses val="autoZero"/>
         <c:auto val="1"/>
         <c:lblAlgn val="ctr"/>
@@ -687,7 +687,7 @@
         <c:noMultiLvlLbl val="0"/>
       </c:catAx>
       <c:valAx>
-        <c:axId val="26724966"/>
+        <c:axId val="67986541"/>
         <c:scaling>
           <c:orientation val="minMax"/>
         </c:scaling>
@@ -731,7 +731,7 @@
             </a:pPr>
           </a:p>
         </c:txPr>
-        <c:crossAx val="50777322"/>
+        <c:crossAx val="82769449"/>
         <c:crosses val="autoZero"/>
         <c:crossBetween val="between"/>
       </c:valAx>
@@ -1023,11 +1023,11 @@
         </c:ser>
         <c:gapWidth val="60"/>
         <c:overlap val="0"/>
-        <c:axId val="6752323"/>
-        <c:axId val="20618085"/>
+        <c:axId val="84892093"/>
+        <c:axId val="12505195"/>
       </c:barChart>
       <c:catAx>
-        <c:axId val="6752323"/>
+        <c:axId val="84892093"/>
         <c:scaling>
           <c:orientation val="minMax"/>
         </c:scaling>
@@ -1061,7 +1061,7 @@
             </a:pPr>
           </a:p>
         </c:txPr>
-        <c:crossAx val="20618085"/>
+        <c:crossAx val="12505195"/>
         <c:crosses val="autoZero"/>
         <c:auto val="1"/>
         <c:lblAlgn val="ctr"/>
@@ -1069,7 +1069,7 @@
         <c:noMultiLvlLbl val="0"/>
       </c:catAx>
       <c:valAx>
-        <c:axId val="20618085"/>
+        <c:axId val="12505195"/>
         <c:scaling>
           <c:orientation val="minMax"/>
         </c:scaling>
@@ -1113,7 +1113,7 @@
             </a:pPr>
           </a:p>
         </c:txPr>
-        <c:crossAx val="6752323"/>
+        <c:crossAx val="84892093"/>
         <c:crosses val="autoZero"/>
         <c:crossBetween val="between"/>
       </c:valAx>
@@ -1315,11 +1315,11 @@
         </c:ser>
         <c:gapWidth val="60"/>
         <c:overlap val="0"/>
-        <c:axId val="82943013"/>
-        <c:axId val="74107850"/>
+        <c:axId val="60971239"/>
+        <c:axId val="83700478"/>
       </c:barChart>
       <c:catAx>
-        <c:axId val="82943013"/>
+        <c:axId val="60971239"/>
         <c:scaling>
           <c:orientation val="minMax"/>
         </c:scaling>
@@ -1353,7 +1353,7 @@
             </a:pPr>
           </a:p>
         </c:txPr>
-        <c:crossAx val="74107850"/>
+        <c:crossAx val="83700478"/>
         <c:crosses val="autoZero"/>
         <c:auto val="1"/>
         <c:lblAlgn val="ctr"/>
@@ -1361,7 +1361,7 @@
         <c:noMultiLvlLbl val="0"/>
       </c:catAx>
       <c:valAx>
-        <c:axId val="74107850"/>
+        <c:axId val="83700478"/>
         <c:scaling>
           <c:orientation val="minMax"/>
         </c:scaling>
@@ -1405,7 +1405,7 @@
             </a:pPr>
           </a:p>
         </c:txPr>
-        <c:crossAx val="82943013"/>
+        <c:crossAx val="60971239"/>
         <c:crosses val="autoZero"/>
         <c:crossBetween val="between"/>
       </c:valAx>
@@ -1697,11 +1697,11 @@
         </c:ser>
         <c:gapWidth val="60"/>
         <c:overlap val="0"/>
-        <c:axId val="84577344"/>
-        <c:axId val="25559439"/>
+        <c:axId val="11622749"/>
+        <c:axId val="67261520"/>
       </c:barChart>
       <c:catAx>
-        <c:axId val="84577344"/>
+        <c:axId val="11622749"/>
         <c:scaling>
           <c:orientation val="minMax"/>
         </c:scaling>
@@ -1735,7 +1735,7 @@
             </a:pPr>
           </a:p>
         </c:txPr>
-        <c:crossAx val="25559439"/>
+        <c:crossAx val="67261520"/>
         <c:crosses val="autoZero"/>
         <c:auto val="1"/>
         <c:lblAlgn val="ctr"/>
@@ -1743,7 +1743,7 @@
         <c:noMultiLvlLbl val="0"/>
       </c:catAx>
       <c:valAx>
-        <c:axId val="25559439"/>
+        <c:axId val="67261520"/>
         <c:scaling>
           <c:orientation val="minMax"/>
           <c:max val="8"/>
@@ -1789,7 +1789,7 @@
             </a:pPr>
           </a:p>
         </c:txPr>
-        <c:crossAx val="84577344"/>
+        <c:crossAx val="11622749"/>
         <c:crosses val="autoZero"/>
         <c:crossBetween val="between"/>
         <c:majorUnit val="2"/>
@@ -3255,7 +3255,7 @@
             <a:pPr indent="0" algn="r">
               <a:buNone/>
             </a:pPr>
-            <a:fld id="{AEE6B445-880A-40EF-BDC5-46BE8E26EA38}" type="slidenum">
+            <a:fld id="{56D46BC6-F70F-4F5A-AB65-99F673846A00}" type="slidenum">
               <a:rPr lang="de-DE" sz="1400" b="0" u="none" strike="noStrike">
                 <a:solidFill>
                   <a:srgbClr val="000000"/>
@@ -3313,7 +3313,7 @@
         <p:spPr>
           <a:xfrm>
             <a:off x="720000" y="900000"/>
-            <a:ext cx="6118920" cy="3440520"/>
+            <a:ext cx="6118560" cy="3440160"/>
           </a:xfrm>
           <a:prstGeom prst="rect">
             <a:avLst/>
@@ -3336,7 +3336,7 @@
         <p:spPr>
           <a:xfrm>
             <a:off x="720000" y="4680000"/>
-            <a:ext cx="6118920" cy="5038920"/>
+            <a:ext cx="6118560" cy="5038560"/>
           </a:xfrm>
           <a:prstGeom prst="rect">
             <a:avLst/>
@@ -3474,7 +3474,7 @@
         <p:spPr>
           <a:xfrm>
             <a:off x="5940000" y="10080000"/>
-            <a:ext cx="898920" cy="358920"/>
+            <a:ext cx="898560" cy="358560"/>
           </a:xfrm>
           <a:prstGeom prst="rect">
             <a:avLst/>
@@ -3518,7 +3518,7 @@
                 <a:tab pos="0" algn="l"/>
               </a:tabLst>
             </a:pPr>
-            <a:fld id="{51FEA63E-21E5-43A4-ABEA-EA015914484B}" type="slidenum">
+            <a:fld id="{7E6AF7F7-A06F-4FAF-9C49-A8A04CFB890E}" type="slidenum">
               <a:rPr lang="en-US" sz="1800" b="0" u="none" strike="noStrike">
                 <a:solidFill>
                   <a:schemeClr val="dk1"/>
@@ -3576,7 +3576,7 @@
         <p:spPr>
           <a:xfrm>
             <a:off x="720000" y="900000"/>
-            <a:ext cx="6118920" cy="3440520"/>
+            <a:ext cx="6118560" cy="3440160"/>
           </a:xfrm>
           <a:prstGeom prst="rect">
             <a:avLst/>
@@ -3599,7 +3599,7 @@
         <p:spPr>
           <a:xfrm>
             <a:off x="5940000" y="10080000"/>
-            <a:ext cx="898920" cy="358920"/>
+            <a:ext cx="898560" cy="358560"/>
           </a:xfrm>
           <a:prstGeom prst="rect">
             <a:avLst/>
@@ -3642,7 +3642,7 @@
                 <a:tab pos="0" algn="l"/>
               </a:tabLst>
             </a:pPr>
-            <a:fld id="{98E7DA4E-DDBC-49BF-B3AD-1CF1C11C53FE}" type="slidenum">
+            <a:fld id="{012D9D7C-1EA5-470E-B74E-62320E1BFC5A}" type="slidenum">
               <a:rPr lang="de-DE" sz="1200" b="0" u="none" strike="noStrike">
                 <a:solidFill>
                   <a:srgbClr val="000000"/>
@@ -3677,7 +3677,7 @@
         <p:spPr>
           <a:xfrm>
             <a:off x="720000" y="4680000"/>
-            <a:ext cx="6118920" cy="5038920"/>
+            <a:ext cx="6118560" cy="5038560"/>
           </a:xfrm>
           <a:prstGeom prst="rect">
             <a:avLst/>
@@ -3913,7 +3913,7 @@
         <p:spPr>
           <a:xfrm>
             <a:off x="720000" y="900000"/>
-            <a:ext cx="6118920" cy="3440520"/>
+            <a:ext cx="6118560" cy="3440160"/>
           </a:xfrm>
           <a:prstGeom prst="rect">
             <a:avLst/>
@@ -3936,7 +3936,7 @@
         <p:spPr>
           <a:xfrm>
             <a:off x="720000" y="4680000"/>
-            <a:ext cx="6118920" cy="5038920"/>
+            <a:ext cx="6118560" cy="5038560"/>
           </a:xfrm>
           <a:prstGeom prst="rect">
             <a:avLst/>
@@ -4655,7 +4655,7 @@
         <p:spPr>
           <a:xfrm>
             <a:off x="5940000" y="10080000"/>
-            <a:ext cx="898920" cy="358920"/>
+            <a:ext cx="898560" cy="358560"/>
           </a:xfrm>
           <a:prstGeom prst="rect">
             <a:avLst/>
@@ -4699,7 +4699,7 @@
                 <a:tab pos="0" algn="l"/>
               </a:tabLst>
             </a:pPr>
-            <a:fld id="{B1146076-C9F1-4774-89F2-25DCBF83DFD6}" type="slidenum">
+            <a:fld id="{E79A47A8-FD3A-4F83-8631-6964C1D4E23C}" type="slidenum">
               <a:rPr lang="en-US" sz="1800" b="0" u="none" strike="noStrike">
                 <a:solidFill>
                   <a:schemeClr val="dk1"/>
@@ -4757,7 +4757,7 @@
         <p:spPr>
           <a:xfrm>
             <a:off x="720000" y="900000"/>
-            <a:ext cx="6118920" cy="3440520"/>
+            <a:ext cx="6118560" cy="3440160"/>
           </a:xfrm>
           <a:prstGeom prst="rect">
             <a:avLst/>
@@ -4780,7 +4780,7 @@
         <p:spPr>
           <a:xfrm>
             <a:off x="720000" y="4680000"/>
-            <a:ext cx="6118920" cy="5038920"/>
+            <a:ext cx="6118560" cy="5038560"/>
           </a:xfrm>
           <a:prstGeom prst="rect">
             <a:avLst/>
@@ -4921,7 +4921,7 @@
         <p:spPr>
           <a:xfrm>
             <a:off x="5940000" y="10080000"/>
-            <a:ext cx="898920" cy="358920"/>
+            <a:ext cx="898560" cy="358560"/>
           </a:xfrm>
           <a:prstGeom prst="rect">
             <a:avLst/>
@@ -4965,7 +4965,7 @@
                 <a:tab pos="0" algn="l"/>
               </a:tabLst>
             </a:pPr>
-            <a:fld id="{8FF466DC-B16C-4439-8FAA-1D56D5EA7421}" type="slidenum">
+            <a:fld id="{5A379F24-9FA7-4ACA-8ED6-DE36332662FD}" type="slidenum">
               <a:rPr lang="en-US" sz="1800" b="0" u="none" strike="noStrike">
                 <a:solidFill>
                   <a:schemeClr val="dk1"/>
@@ -5023,7 +5023,7 @@
         <p:spPr>
           <a:xfrm>
             <a:off x="720000" y="900000"/>
-            <a:ext cx="6118920" cy="3440520"/>
+            <a:ext cx="6118560" cy="3440160"/>
           </a:xfrm>
           <a:prstGeom prst="rect">
             <a:avLst/>
@@ -5046,7 +5046,7 @@
         <p:spPr>
           <a:xfrm>
             <a:off x="720000" y="4680000"/>
-            <a:ext cx="6118920" cy="5038920"/>
+            <a:ext cx="6118560" cy="5038560"/>
           </a:xfrm>
           <a:prstGeom prst="rect">
             <a:avLst/>
@@ -5285,7 +5285,7 @@
         <p:spPr>
           <a:xfrm>
             <a:off x="5940000" y="10080000"/>
-            <a:ext cx="898920" cy="358920"/>
+            <a:ext cx="898560" cy="358560"/>
           </a:xfrm>
           <a:prstGeom prst="rect">
             <a:avLst/>
@@ -5329,7 +5329,7 @@
                 <a:tab pos="0" algn="l"/>
               </a:tabLst>
             </a:pPr>
-            <a:fld id="{08BB0D4D-CF7D-4F76-B219-F9EEB564A54A}" type="slidenum">
+            <a:fld id="{706799DE-749E-4404-96D8-CDEFC4ED43C1}" type="slidenum">
               <a:rPr lang="en-US" sz="1800" b="0" u="none" strike="noStrike">
                 <a:solidFill>
                   <a:schemeClr val="dk1"/>
@@ -5387,7 +5387,7 @@
         <p:spPr>
           <a:xfrm>
             <a:off x="720000" y="900000"/>
-            <a:ext cx="6118920" cy="3440520"/>
+            <a:ext cx="6118560" cy="3440160"/>
           </a:xfrm>
           <a:prstGeom prst="rect">
             <a:avLst/>
@@ -5410,7 +5410,7 @@
         <p:spPr>
           <a:xfrm>
             <a:off x="720000" y="4680000"/>
-            <a:ext cx="6118920" cy="5038920"/>
+            <a:ext cx="6118560" cy="5038560"/>
           </a:xfrm>
           <a:prstGeom prst="rect">
             <a:avLst/>
@@ -5731,7 +5731,7 @@
         <p:spPr>
           <a:xfrm>
             <a:off x="5940000" y="10080000"/>
-            <a:ext cx="898920" cy="358920"/>
+            <a:ext cx="898560" cy="358560"/>
           </a:xfrm>
           <a:prstGeom prst="rect">
             <a:avLst/>
@@ -5775,7 +5775,7 @@
                 <a:tab pos="0" algn="l"/>
               </a:tabLst>
             </a:pPr>
-            <a:fld id="{8BF6272A-423C-43B1-8ABA-456B9D1A5762}" type="slidenum">
+            <a:fld id="{E88F2C72-6FE3-4766-812E-4D37A744E93D}" type="slidenum">
               <a:rPr lang="en-US" sz="1800" b="0" u="none" strike="noStrike">
                 <a:solidFill>
                   <a:schemeClr val="dk1"/>
@@ -5833,7 +5833,7 @@
         <p:spPr>
           <a:xfrm>
             <a:off x="720000" y="900000"/>
-            <a:ext cx="6118920" cy="3440520"/>
+            <a:ext cx="6118560" cy="3440160"/>
           </a:xfrm>
           <a:prstGeom prst="rect">
             <a:avLst/>
@@ -5856,7 +5856,7 @@
         <p:spPr>
           <a:xfrm>
             <a:off x="720000" y="4680000"/>
-            <a:ext cx="6118920" cy="5038920"/>
+            <a:ext cx="6118560" cy="5038560"/>
           </a:xfrm>
           <a:prstGeom prst="rect">
             <a:avLst/>
@@ -6035,7 +6035,7 @@
         <p:spPr>
           <a:xfrm>
             <a:off x="5940000" y="10080000"/>
-            <a:ext cx="898920" cy="358920"/>
+            <a:ext cx="898560" cy="358560"/>
           </a:xfrm>
           <a:prstGeom prst="rect">
             <a:avLst/>
@@ -6079,7 +6079,7 @@
                 <a:tab pos="0" algn="l"/>
               </a:tabLst>
             </a:pPr>
-            <a:fld id="{9257F1CF-45B8-4E2A-9C71-DCEB28D777ED}" type="slidenum">
+            <a:fld id="{066F538A-642A-411A-A47C-D4EFBE84CB12}" type="slidenum">
               <a:rPr lang="en-US" sz="1800" b="0" u="none" strike="noStrike">
                 <a:solidFill>
                   <a:schemeClr val="dk1"/>
@@ -6137,7 +6137,7 @@
         <p:spPr>
           <a:xfrm>
             <a:off x="720000" y="900000"/>
-            <a:ext cx="6118920" cy="3440520"/>
+            <a:ext cx="6118560" cy="3440160"/>
           </a:xfrm>
           <a:prstGeom prst="rect">
             <a:avLst/>
@@ -6160,7 +6160,7 @@
         <p:spPr>
           <a:xfrm>
             <a:off x="720000" y="4680000"/>
-            <a:ext cx="6118920" cy="5038920"/>
+            <a:ext cx="6118560" cy="5038560"/>
           </a:xfrm>
           <a:prstGeom prst="rect">
             <a:avLst/>
@@ -6279,7 +6279,7 @@
         <p:spPr>
           <a:xfrm>
             <a:off x="5940000" y="10080000"/>
-            <a:ext cx="898920" cy="358920"/>
+            <a:ext cx="898560" cy="358560"/>
           </a:xfrm>
           <a:prstGeom prst="rect">
             <a:avLst/>
@@ -6323,7 +6323,7 @@
                 <a:tab pos="0" algn="l"/>
               </a:tabLst>
             </a:pPr>
-            <a:fld id="{675908A2-8E1F-4A26-A4DC-5F0C348B6351}" type="slidenum">
+            <a:fld id="{E4748E3B-6070-440A-937D-914EEE916668}" type="slidenum">
               <a:rPr lang="en-US" sz="1800" b="0" u="none" strike="noStrike">
                 <a:solidFill>
                   <a:schemeClr val="dk1"/>
@@ -6381,7 +6381,7 @@
         <p:spPr>
           <a:xfrm>
             <a:off x="720000" y="900000"/>
-            <a:ext cx="6118920" cy="3440520"/>
+            <a:ext cx="6118560" cy="3440160"/>
           </a:xfrm>
           <a:prstGeom prst="rect">
             <a:avLst/>
@@ -6404,7 +6404,7 @@
         <p:spPr>
           <a:xfrm>
             <a:off x="720000" y="4680000"/>
-            <a:ext cx="6118920" cy="5038920"/>
+            <a:ext cx="6118560" cy="5038560"/>
           </a:xfrm>
           <a:prstGeom prst="rect">
             <a:avLst/>
@@ -6643,7 +6643,7 @@
         <p:spPr>
           <a:xfrm>
             <a:off x="5940000" y="10080000"/>
-            <a:ext cx="898920" cy="358920"/>
+            <a:ext cx="898560" cy="358560"/>
           </a:xfrm>
           <a:prstGeom prst="rect">
             <a:avLst/>
@@ -6687,7 +6687,7 @@
                 <a:tab pos="0" algn="l"/>
               </a:tabLst>
             </a:pPr>
-            <a:fld id="{07D35EC2-E3F6-4732-A2D7-2A12CC028D3E}" type="slidenum">
+            <a:fld id="{44E4ADC8-3F46-42E1-8E2E-B7F4C9632F69}" type="slidenum">
               <a:rPr lang="en-US" sz="1800" b="0" u="none" strike="noStrike">
                 <a:solidFill>
                   <a:schemeClr val="dk1"/>
@@ -6745,7 +6745,7 @@
         <p:spPr>
           <a:xfrm>
             <a:off x="720000" y="900000"/>
-            <a:ext cx="6118920" cy="3440520"/>
+            <a:ext cx="6118560" cy="3440160"/>
           </a:xfrm>
           <a:prstGeom prst="rect">
             <a:avLst/>
@@ -6768,7 +6768,7 @@
         <p:spPr>
           <a:xfrm>
             <a:off x="720000" y="4680000"/>
-            <a:ext cx="6118920" cy="5038920"/>
+            <a:ext cx="6118560" cy="5038560"/>
           </a:xfrm>
           <a:prstGeom prst="rect">
             <a:avLst/>
@@ -7007,7 +7007,7 @@
         <p:spPr>
           <a:xfrm>
             <a:off x="5940000" y="10080000"/>
-            <a:ext cx="898920" cy="358920"/>
+            <a:ext cx="898560" cy="358560"/>
           </a:xfrm>
           <a:prstGeom prst="rect">
             <a:avLst/>
@@ -7051,7 +7051,7 @@
                 <a:tab pos="0" algn="l"/>
               </a:tabLst>
             </a:pPr>
-            <a:fld id="{5BB2E0AA-62EE-4E8A-8C38-A6DB12DE806A}" type="slidenum">
+            <a:fld id="{15AAAA40-E326-4D42-9039-87C2B7FC8381}" type="slidenum">
               <a:rPr lang="en-US" sz="1200" b="0" u="none" strike="noStrike">
                 <a:solidFill>
                   <a:schemeClr val="dk1"/>
@@ -7109,7 +7109,7 @@
         <p:spPr>
           <a:xfrm>
             <a:off x="720000" y="900000"/>
-            <a:ext cx="6118920" cy="3440520"/>
+            <a:ext cx="6118560" cy="3440160"/>
           </a:xfrm>
           <a:prstGeom prst="rect">
             <a:avLst/>
@@ -7132,7 +7132,7 @@
         <p:spPr>
           <a:xfrm>
             <a:off x="720000" y="4680000"/>
-            <a:ext cx="6118920" cy="5038920"/>
+            <a:ext cx="6118560" cy="5038560"/>
           </a:xfrm>
           <a:prstGeom prst="rect">
             <a:avLst/>
@@ -7311,7 +7311,7 @@
         <p:spPr>
           <a:xfrm>
             <a:off x="5940000" y="10080000"/>
-            <a:ext cx="898920" cy="358920"/>
+            <a:ext cx="898560" cy="358560"/>
           </a:xfrm>
           <a:prstGeom prst="rect">
             <a:avLst/>
@@ -7355,7 +7355,7 @@
                 <a:tab pos="0" algn="l"/>
               </a:tabLst>
             </a:pPr>
-            <a:fld id="{C6717F3B-82F2-40E2-98E2-9FF72F144566}" type="slidenum">
+            <a:fld id="{C8523900-09D3-4CF5-9169-2037D5C7EAD5}" type="slidenum">
               <a:rPr lang="en-US" sz="1800" b="0" u="none" strike="noStrike">
                 <a:solidFill>
                   <a:schemeClr val="dk1"/>
@@ -7413,7 +7413,7 @@
         <p:spPr>
           <a:xfrm>
             <a:off x="720000" y="900000"/>
-            <a:ext cx="6118920" cy="3440520"/>
+            <a:ext cx="6118560" cy="3440160"/>
           </a:xfrm>
           <a:prstGeom prst="rect">
             <a:avLst/>
@@ -7436,7 +7436,7 @@
         <p:spPr>
           <a:xfrm>
             <a:off x="5940000" y="10080000"/>
-            <a:ext cx="898920" cy="358920"/>
+            <a:ext cx="898560" cy="358560"/>
           </a:xfrm>
           <a:prstGeom prst="rect">
             <a:avLst/>
@@ -7480,7 +7480,7 @@
                 <a:tab pos="0" algn="l"/>
               </a:tabLst>
             </a:pPr>
-            <a:fld id="{11390EF3-7F4C-4CE9-89DB-D46C742CC31E}" type="slidenum">
+            <a:fld id="{78FECE4F-8F47-48B0-A9D8-70AD7A359DEF}" type="slidenum">
               <a:rPr lang="en-US" sz="1800" b="0" u="none" strike="noStrike">
                 <a:solidFill>
                   <a:schemeClr val="dk1"/>
@@ -7516,7 +7516,7 @@
         <p:spPr>
           <a:xfrm>
             <a:off x="720000" y="4680000"/>
-            <a:ext cx="6118920" cy="5038920"/>
+            <a:ext cx="6118560" cy="5038560"/>
           </a:xfrm>
           <a:prstGeom prst="rect">
             <a:avLst/>
@@ -7747,7 +7747,7 @@
         <p:spPr>
           <a:xfrm>
             <a:off x="720000" y="900000"/>
-            <a:ext cx="6118920" cy="3440520"/>
+            <a:ext cx="6118560" cy="3440160"/>
           </a:xfrm>
           <a:prstGeom prst="rect">
             <a:avLst/>
@@ -7770,7 +7770,7 @@
         <p:spPr>
           <a:xfrm>
             <a:off x="720000" y="4680000"/>
-            <a:ext cx="6118920" cy="5038920"/>
+            <a:ext cx="6118560" cy="5038560"/>
           </a:xfrm>
           <a:prstGeom prst="rect">
             <a:avLst/>
@@ -8053,7 +8053,7 @@
         <p:spPr>
           <a:xfrm>
             <a:off x="5940000" y="10080000"/>
-            <a:ext cx="898920" cy="358920"/>
+            <a:ext cx="898560" cy="358560"/>
           </a:xfrm>
           <a:prstGeom prst="rect">
             <a:avLst/>
@@ -8097,7 +8097,7 @@
                 <a:tab pos="0" algn="l"/>
               </a:tabLst>
             </a:pPr>
-            <a:fld id="{BDE3312E-056A-4805-A3C1-10428D7A90AC}" type="slidenum">
+            <a:fld id="{0BBBB367-D451-4B02-92F4-49AF26F36BF0}" type="slidenum">
               <a:rPr lang="en-US" sz="1800" b="0" u="none" strike="noStrike">
                 <a:solidFill>
                   <a:schemeClr val="dk1"/>
@@ -8155,7 +8155,7 @@
         <p:spPr>
           <a:xfrm>
             <a:off x="720000" y="900000"/>
-            <a:ext cx="6118920" cy="3440520"/>
+            <a:ext cx="6118560" cy="3440160"/>
           </a:xfrm>
           <a:prstGeom prst="rect">
             <a:avLst/>
@@ -8178,7 +8178,7 @@
         <p:spPr>
           <a:xfrm>
             <a:off x="720000" y="4680000"/>
-            <a:ext cx="6118920" cy="5038920"/>
+            <a:ext cx="6118560" cy="5038560"/>
           </a:xfrm>
           <a:prstGeom prst="rect">
             <a:avLst/>
@@ -8212,6 +8212,481 @@
                 <a:latin typeface="Arial"/>
               </a:rPr>
               <a:t>Vielen Dank für eure Aufmerksamkeit, gibt es noch irgendwlche Fragen?</a:t>
+            </a:r>
+            <a:endParaRPr lang="de-DE" sz="1800" b="0" u="none" strike="noStrike">
+              <a:solidFill>
+                <a:srgbClr val="000000"/>
+              </a:solidFill>
+              <a:effectLst/>
+              <a:uFillTx/>
+              <a:latin typeface="Arial"/>
+            </a:endParaRPr>
+          </a:p>
+          <a:p>
+            <a:pPr marL="216000" indent="-216000" algn="l">
+              <a:lnSpc>
+                <a:spcPct val="100000"/>
+              </a:lnSpc>
+              <a:buNone/>
+              <a:tabLst>
+                <a:tab pos="0" algn="l"/>
+              </a:tabLst>
+            </a:pPr>
+            <a:r>
+              <a:rPr lang="de-DE" sz="1800" b="0" u="none" strike="noStrike">
+                <a:solidFill>
+                  <a:srgbClr val="000000"/>
+                </a:solidFill>
+                <a:effectLst/>
+                <a:uFillTx/>
+                <a:latin typeface="Arial"/>
+              </a:rPr>
+              <a:t>-</a:t>
+            </a:r>
+            <a:endParaRPr lang="de-DE" sz="1800" b="0" u="none" strike="noStrike">
+              <a:solidFill>
+                <a:srgbClr val="000000"/>
+              </a:solidFill>
+              <a:effectLst/>
+              <a:uFillTx/>
+              <a:latin typeface="Arial"/>
+            </a:endParaRPr>
+          </a:p>
+          <a:p>
+            <a:pPr marL="216000" indent="-216000" algn="l">
+              <a:lnSpc>
+                <a:spcPct val="100000"/>
+              </a:lnSpc>
+              <a:buNone/>
+              <a:tabLst>
+                <a:tab pos="0" algn="l"/>
+              </a:tabLst>
+            </a:pPr>
+            <a:r>
+              <a:rPr lang="de-DE" sz="1800" b="0" u="none" strike="noStrike">
+                <a:solidFill>
+                  <a:srgbClr val="000000"/>
+                </a:solidFill>
+                <a:effectLst/>
+                <a:uFillTx/>
+                <a:latin typeface="Arial"/>
+              </a:rPr>
+              <a:t>-</a:t>
+            </a:r>
+            <a:endParaRPr lang="de-DE" sz="1800" b="0" u="none" strike="noStrike">
+              <a:solidFill>
+                <a:srgbClr val="000000"/>
+              </a:solidFill>
+              <a:effectLst/>
+              <a:uFillTx/>
+              <a:latin typeface="Arial"/>
+            </a:endParaRPr>
+          </a:p>
+          <a:p>
+            <a:pPr marL="216000" indent="-216000" algn="l">
+              <a:lnSpc>
+                <a:spcPct val="100000"/>
+              </a:lnSpc>
+              <a:buNone/>
+              <a:tabLst>
+                <a:tab pos="0" algn="l"/>
+              </a:tabLst>
+            </a:pPr>
+            <a:r>
+              <a:rPr lang="de-DE" sz="1800" b="0" u="none" strike="noStrike">
+                <a:solidFill>
+                  <a:srgbClr val="000000"/>
+                </a:solidFill>
+                <a:effectLst/>
+                <a:uFillTx/>
+                <a:latin typeface="Arial"/>
+              </a:rPr>
+              <a:t>„Warum habt ihr nur ein lokales STT-Modell (Whisper) genutzt?"</a:t>
+            </a:r>
+            <a:endParaRPr lang="de-DE" sz="1800" b="0" u="none" strike="noStrike">
+              <a:solidFill>
+                <a:srgbClr val="000000"/>
+              </a:solidFill>
+              <a:effectLst/>
+              <a:uFillTx/>
+              <a:latin typeface="Arial"/>
+            </a:endParaRPr>
+          </a:p>
+          <a:p>
+            <a:pPr marL="216000" indent="-216000" algn="l">
+              <a:lnSpc>
+                <a:spcPct val="100000"/>
+              </a:lnSpc>
+              <a:buNone/>
+              <a:tabLst>
+                <a:tab pos="0" algn="l"/>
+              </a:tabLst>
+            </a:pPr>
+            <a:r>
+              <a:rPr lang="de-DE" sz="1800" b="0" u="none" strike="noStrike">
+                <a:solidFill>
+                  <a:srgbClr val="000000"/>
+                </a:solidFill>
+                <a:effectLst/>
+                <a:uFillTx/>
+                <a:latin typeface="Arial"/>
+              </a:rPr>
+              <a:t>- </a:t>
+            </a:r>
+            <a:endParaRPr lang="de-DE" sz="1800" b="0" u="none" strike="noStrike">
+              <a:solidFill>
+                <a:srgbClr val="000000"/>
+              </a:solidFill>
+              <a:effectLst/>
+              <a:uFillTx/>
+              <a:latin typeface="Arial"/>
+            </a:endParaRPr>
+          </a:p>
+          <a:p>
+            <a:pPr marL="216000" indent="-216000" algn="l">
+              <a:lnSpc>
+                <a:spcPct val="100000"/>
+              </a:lnSpc>
+              <a:buNone/>
+              <a:tabLst>
+                <a:tab pos="0" algn="l"/>
+              </a:tabLst>
+            </a:pPr>
+            <a:r>
+              <a:rPr lang="de-DE" sz="1800" b="0" u="none" strike="noStrike">
+                <a:solidFill>
+                  <a:srgbClr val="000000"/>
+                </a:solidFill>
+                <a:effectLst/>
+                <a:uFillTx/>
+                <a:latin typeface="Arial"/>
+              </a:rPr>
+              <a:t>Es gibt im Open-Source-Bereich für STT praktisch keine ernst zu nehmende </a:t>
+            </a:r>
+            <a:r>
+              <a:rPr lang="de-DE" sz="1800" b="0" u="none" strike="noStrike">
+                <a:solidFill>
+                  <a:srgbClr val="000000"/>
+                </a:solidFill>
+                <a:effectLst/>
+                <a:uFillTx/>
+                <a:latin typeface="Arial"/>
+              </a:rPr>
+              <a:t>Alternative zu Whisper. Andere Modelle (wie wav2vec2 oder Vosk) sind </a:t>
+            </a:r>
+            <a:r>
+              <a:rPr lang="de-DE" sz="1800" b="0" u="none" strike="noStrike">
+                <a:solidFill>
+                  <a:srgbClr val="000000"/>
+                </a:solidFill>
+                <a:effectLst/>
+                <a:uFillTx/>
+                <a:latin typeface="Arial"/>
+              </a:rPr>
+              <a:t>generell deutlich schwächer. </a:t>
+            </a:r>
+            <a:endParaRPr lang="de-DE" sz="1800" b="0" u="none" strike="noStrike">
+              <a:solidFill>
+                <a:srgbClr val="000000"/>
+              </a:solidFill>
+              <a:effectLst/>
+              <a:uFillTx/>
+              <a:latin typeface="Arial"/>
+            </a:endParaRPr>
+          </a:p>
+          <a:p>
+            <a:pPr marL="216000" indent="-216000" algn="l">
+              <a:lnSpc>
+                <a:spcPct val="100000"/>
+              </a:lnSpc>
+              <a:buNone/>
+              <a:tabLst>
+                <a:tab pos="0" algn="l"/>
+              </a:tabLst>
+            </a:pPr>
+            <a:r>
+              <a:rPr lang="de-DE" sz="1800" b="0" u="none" strike="noStrike">
+                <a:solidFill>
+                  <a:srgbClr val="000000"/>
+                </a:solidFill>
+                <a:effectLst/>
+                <a:uFillTx/>
+                <a:latin typeface="Arial"/>
+              </a:rPr>
+              <a:t>- </a:t>
+            </a:r>
+            <a:endParaRPr lang="de-DE" sz="1800" b="0" u="none" strike="noStrike">
+              <a:solidFill>
+                <a:srgbClr val="000000"/>
+              </a:solidFill>
+              <a:effectLst/>
+              <a:uFillTx/>
+              <a:latin typeface="Arial"/>
+            </a:endParaRPr>
+          </a:p>
+          <a:p>
+            <a:pPr marL="216000" indent="-216000" algn="l">
+              <a:lnSpc>
+                <a:spcPct val="100000"/>
+              </a:lnSpc>
+              <a:buNone/>
+              <a:tabLst>
+                <a:tab pos="0" algn="l"/>
+              </a:tabLst>
+            </a:pPr>
+            <a:r>
+              <a:rPr lang="de-DE" sz="1800" b="0" u="none" strike="noStrike">
+                <a:solidFill>
+                  <a:srgbClr val="000000"/>
+                </a:solidFill>
+                <a:effectLst/>
+                <a:uFillTx/>
+                <a:latin typeface="Arial"/>
+              </a:rPr>
+              <a:t>Whisper turbo war die beste Balance aus Qualität, Geschwindigkeit und </a:t>
+            </a:r>
+            <a:r>
+              <a:rPr lang="de-DE" sz="1800" b="0" u="none" strike="noStrike">
+                <a:solidFill>
+                  <a:srgbClr val="000000"/>
+                </a:solidFill>
+                <a:effectLst/>
+                <a:uFillTx/>
+                <a:latin typeface="Arial"/>
+              </a:rPr>
+              <a:t>Community-Support.</a:t>
+            </a:r>
+            <a:endParaRPr lang="de-DE" sz="1800" b="0" u="none" strike="noStrike">
+              <a:solidFill>
+                <a:srgbClr val="000000"/>
+              </a:solidFill>
+              <a:effectLst/>
+              <a:uFillTx/>
+              <a:latin typeface="Arial"/>
+            </a:endParaRPr>
+          </a:p>
+          <a:p>
+            <a:pPr marL="216000" indent="-216000" algn="l">
+              <a:lnSpc>
+                <a:spcPct val="100000"/>
+              </a:lnSpc>
+              <a:buNone/>
+              <a:tabLst>
+                <a:tab pos="0" algn="l"/>
+              </a:tabLst>
+            </a:pPr>
+            <a:r>
+              <a:rPr lang="de-DE" sz="1800" b="0" u="none" strike="noStrike">
+                <a:solidFill>
+                  <a:srgbClr val="000000"/>
+                </a:solidFill>
+                <a:effectLst/>
+                <a:uFillTx/>
+                <a:latin typeface="Arial"/>
+              </a:rPr>
+              <a:t>-</a:t>
+            </a:r>
+            <a:endParaRPr lang="de-DE" sz="1800" b="0" u="none" strike="noStrike">
+              <a:solidFill>
+                <a:srgbClr val="000000"/>
+              </a:solidFill>
+              <a:effectLst/>
+              <a:uFillTx/>
+              <a:latin typeface="Arial"/>
+            </a:endParaRPr>
+          </a:p>
+          <a:p>
+            <a:pPr marL="216000" indent="-216000" algn="l">
+              <a:lnSpc>
+                <a:spcPct val="100000"/>
+              </a:lnSpc>
+              <a:buNone/>
+              <a:tabLst>
+                <a:tab pos="0" algn="l"/>
+              </a:tabLst>
+            </a:pPr>
+            <a:r>
+              <a:rPr lang="de-DE" sz="1800" b="0" u="none" strike="noStrike">
+                <a:solidFill>
+                  <a:srgbClr val="000000"/>
+                </a:solidFill>
+                <a:effectLst/>
+                <a:uFillTx/>
+                <a:latin typeface="Arial"/>
+              </a:rPr>
+              <a:t>-</a:t>
+            </a:r>
+            <a:endParaRPr lang="de-DE" sz="1800" b="0" u="none" strike="noStrike">
+              <a:solidFill>
+                <a:srgbClr val="000000"/>
+              </a:solidFill>
+              <a:effectLst/>
+              <a:uFillTx/>
+              <a:latin typeface="Arial"/>
+            </a:endParaRPr>
+          </a:p>
+          <a:p>
+            <a:pPr marL="216000" indent="-216000" algn="l">
+              <a:lnSpc>
+                <a:spcPct val="100000"/>
+              </a:lnSpc>
+              <a:buNone/>
+              <a:tabLst>
+                <a:tab pos="0" algn="l"/>
+              </a:tabLst>
+            </a:pPr>
+            <a:r>
+              <a:rPr lang="de-DE" sz="1800" b="0" u="none" strike="noStrike">
+                <a:solidFill>
+                  <a:srgbClr val="000000"/>
+                </a:solidFill>
+                <a:effectLst/>
+                <a:uFillTx/>
+                <a:latin typeface="Arial"/>
+              </a:rPr>
+              <a:t>„Und warum habt ihr nur ein Cloud LLM genutzt?"</a:t>
+            </a:r>
+            <a:endParaRPr lang="de-DE" sz="1800" b="0" u="none" strike="noStrike">
+              <a:solidFill>
+                <a:srgbClr val="000000"/>
+              </a:solidFill>
+              <a:effectLst/>
+              <a:uFillTx/>
+              <a:latin typeface="Arial"/>
+            </a:endParaRPr>
+          </a:p>
+          <a:p>
+            <a:pPr marL="216000" indent="-216000" algn="l">
+              <a:lnSpc>
+                <a:spcPct val="100000"/>
+              </a:lnSpc>
+              <a:buNone/>
+              <a:tabLst>
+                <a:tab pos="0" algn="l"/>
+              </a:tabLst>
+            </a:pPr>
+            <a:r>
+              <a:rPr lang="de-DE" sz="1800" b="0" u="none" strike="noStrike">
+                <a:solidFill>
+                  <a:srgbClr val="000000"/>
+                </a:solidFill>
+                <a:effectLst/>
+                <a:uFillTx/>
+                <a:latin typeface="Arial"/>
+              </a:rPr>
+              <a:t>-</a:t>
+            </a:r>
+            <a:endParaRPr lang="de-DE" sz="1800" b="0" u="none" strike="noStrike">
+              <a:solidFill>
+                <a:srgbClr val="000000"/>
+              </a:solidFill>
+              <a:effectLst/>
+              <a:uFillTx/>
+              <a:latin typeface="Arial"/>
+            </a:endParaRPr>
+          </a:p>
+          <a:p>
+            <a:pPr marL="216000" indent="-216000" algn="l">
+              <a:lnSpc>
+                <a:spcPct val="100000"/>
+              </a:lnSpc>
+              <a:buNone/>
+              <a:tabLst>
+                <a:tab pos="0" algn="l"/>
+              </a:tabLst>
+            </a:pPr>
+            <a:r>
+              <a:rPr lang="de-DE" sz="1800" b="0" u="none" strike="noStrike">
+                <a:solidFill>
+                  <a:srgbClr val="000000"/>
+                </a:solidFill>
+                <a:effectLst/>
+                <a:uFillTx/>
+                <a:latin typeface="Arial"/>
+              </a:rPr>
+              <a:t>  GPT-4o ist das meistgenutzte Modell in vergleichbaren Evaluierungen und gilt </a:t>
+            </a:r>
+            <a:r>
+              <a:rPr lang="de-DE" sz="1800" b="0" u="none" strike="noStrike">
+                <a:solidFill>
+                  <a:srgbClr val="000000"/>
+                </a:solidFill>
+                <a:effectLst/>
+                <a:uFillTx/>
+                <a:latin typeface="Arial"/>
+              </a:rPr>
+              <a:t>als de-facto-Standard. </a:t>
+            </a:r>
+            <a:endParaRPr lang="de-DE" sz="1800" b="0" u="none" strike="noStrike">
+              <a:solidFill>
+                <a:srgbClr val="000000"/>
+              </a:solidFill>
+              <a:effectLst/>
+              <a:uFillTx/>
+              <a:latin typeface="Arial"/>
+            </a:endParaRPr>
+          </a:p>
+          <a:p>
+            <a:pPr marL="216000" indent="-216000" algn="l">
+              <a:lnSpc>
+                <a:spcPct val="100000"/>
+              </a:lnSpc>
+              <a:buNone/>
+              <a:tabLst>
+                <a:tab pos="0" algn="l"/>
+              </a:tabLst>
+            </a:pPr>
+            <a:r>
+              <a:rPr lang="de-DE" sz="1800" b="0" u="none" strike="noStrike">
+                <a:solidFill>
+                  <a:srgbClr val="000000"/>
+                </a:solidFill>
+                <a:effectLst/>
+                <a:uFillTx/>
+                <a:latin typeface="Arial"/>
+              </a:rPr>
+              <a:t>-</a:t>
+            </a:r>
+            <a:endParaRPr lang="de-DE" sz="1800" b="0" u="none" strike="noStrike">
+              <a:solidFill>
+                <a:srgbClr val="000000"/>
+              </a:solidFill>
+              <a:effectLst/>
+              <a:uFillTx/>
+              <a:latin typeface="Arial"/>
+            </a:endParaRPr>
+          </a:p>
+          <a:p>
+            <a:pPr marL="216000" indent="-216000" algn="l">
+              <a:lnSpc>
+                <a:spcPct val="100000"/>
+              </a:lnSpc>
+              <a:buNone/>
+              <a:tabLst>
+                <a:tab pos="0" algn="l"/>
+              </a:tabLst>
+            </a:pPr>
+            <a:r>
+              <a:rPr lang="de-DE" sz="1800" b="0" u="none" strike="noStrike">
+                <a:solidFill>
+                  <a:srgbClr val="000000"/>
+                </a:solidFill>
+                <a:effectLst/>
+                <a:uFillTx/>
+                <a:latin typeface="Arial"/>
+              </a:rPr>
+              <a:t>Ein weiteres Cloud-LLM hätte die Anzahl der Kombinationen deutlich erhöht, </a:t>
+            </a:r>
+            <a:r>
+              <a:rPr lang="de-DE" sz="1800" b="0" u="none" strike="noStrike">
+                <a:solidFill>
+                  <a:srgbClr val="000000"/>
+                </a:solidFill>
+                <a:effectLst/>
+                <a:uFillTx/>
+                <a:latin typeface="Arial"/>
+              </a:rPr>
+              <a:t>ohne den Kernvergleich — lokal vs. Cloud — klarer zu machen. </a:t>
             </a:r>
             <a:endParaRPr lang="de-DE" sz="1800" b="0" u="none" strike="noStrike">
               <a:solidFill>
@@ -8237,7 +8712,7 @@
         <p:spPr>
           <a:xfrm>
             <a:off x="5940000" y="10080000"/>
-            <a:ext cx="898920" cy="358920"/>
+            <a:ext cx="898560" cy="358560"/>
           </a:xfrm>
           <a:prstGeom prst="rect">
             <a:avLst/>
@@ -8281,7 +8756,7 @@
                 <a:tab pos="0" algn="l"/>
               </a:tabLst>
             </a:pPr>
-            <a:fld id="{071C4572-B3FC-44D7-B1A4-D351C09E5816}" type="slidenum">
+            <a:fld id="{974E1444-ABBE-4E97-90CD-D3C3F3BCD9E3}" type="slidenum">
               <a:rPr lang="en-US" sz="1800" b="0" u="none" strike="noStrike">
                 <a:solidFill>
                   <a:schemeClr val="dk1"/>
@@ -8339,7 +8814,7 @@
         <p:spPr>
           <a:xfrm>
             <a:off x="720000" y="900000"/>
-            <a:ext cx="6118920" cy="3440520"/>
+            <a:ext cx="6118560" cy="3440160"/>
           </a:xfrm>
           <a:prstGeom prst="rect">
             <a:avLst/>
@@ -8362,7 +8837,7 @@
         <p:spPr>
           <a:xfrm>
             <a:off x="5940000" y="10080000"/>
-            <a:ext cx="898920" cy="358920"/>
+            <a:ext cx="898560" cy="358560"/>
           </a:xfrm>
           <a:prstGeom prst="rect">
             <a:avLst/>
@@ -8406,7 +8881,7 @@
                 <a:tab pos="0" algn="l"/>
               </a:tabLst>
             </a:pPr>
-            <a:fld id="{5EA94B83-3CD9-4602-BBE7-C7070A2AF624}" type="slidenum">
+            <a:fld id="{DCCA6925-5AFA-4A94-A644-FF6DF568B091}" type="slidenum">
               <a:rPr lang="en-US" sz="1800" b="0" u="none" strike="noStrike">
                 <a:solidFill>
                   <a:schemeClr val="dk1"/>
@@ -8442,7 +8917,7 @@
         <p:spPr>
           <a:xfrm>
             <a:off x="720000" y="4680000"/>
-            <a:ext cx="6118920" cy="5038920"/>
+            <a:ext cx="6118560" cy="5038560"/>
           </a:xfrm>
           <a:prstGeom prst="rect">
             <a:avLst/>
@@ -8613,7 +9088,7 @@
         <p:spPr>
           <a:xfrm>
             <a:off x="720000" y="900000"/>
-            <a:ext cx="6118920" cy="3440520"/>
+            <a:ext cx="6118560" cy="3440160"/>
           </a:xfrm>
           <a:prstGeom prst="rect">
             <a:avLst/>
@@ -8636,7 +9111,7 @@
         <p:spPr>
           <a:xfrm>
             <a:off x="5940000" y="10080000"/>
-            <a:ext cx="898920" cy="358920"/>
+            <a:ext cx="898560" cy="358560"/>
           </a:xfrm>
           <a:prstGeom prst="rect">
             <a:avLst/>
@@ -8680,7 +9155,7 @@
                 <a:tab pos="0" algn="l"/>
               </a:tabLst>
             </a:pPr>
-            <a:fld id="{354B1202-FF57-45C2-BE00-313390055F5A}" type="slidenum">
+            <a:fld id="{EAE7F8B5-8E11-46BC-BF8D-4414E9F6B864}" type="slidenum">
               <a:rPr lang="en-US" sz="1800" b="0" u="none" strike="noStrike">
                 <a:solidFill>
                   <a:schemeClr val="dk1"/>
@@ -8716,7 +9191,7 @@
         <p:spPr>
           <a:xfrm>
             <a:off x="720000" y="4680000"/>
-            <a:ext cx="6118920" cy="5038920"/>
+            <a:ext cx="6118560" cy="5038560"/>
           </a:xfrm>
           <a:prstGeom prst="rect">
             <a:avLst/>
@@ -8917,7 +9392,7 @@
         <p:spPr>
           <a:xfrm>
             <a:off x="720000" y="900000"/>
-            <a:ext cx="6118920" cy="3440520"/>
+            <a:ext cx="6118560" cy="3440160"/>
           </a:xfrm>
           <a:prstGeom prst="rect">
             <a:avLst/>
@@ -8940,7 +9415,7 @@
         <p:spPr>
           <a:xfrm>
             <a:off x="5940000" y="10080000"/>
-            <a:ext cx="898920" cy="358920"/>
+            <a:ext cx="898560" cy="358560"/>
           </a:xfrm>
           <a:prstGeom prst="rect">
             <a:avLst/>
@@ -8984,7 +9459,7 @@
                 <a:tab pos="0" algn="l"/>
               </a:tabLst>
             </a:pPr>
-            <a:fld id="{03C58D09-9BF8-4138-90AE-9533A85C3F9C}" type="slidenum">
+            <a:fld id="{500D5B49-185F-4936-9202-9340E312104A}" type="slidenum">
               <a:rPr lang="en-US" sz="1800" b="0" u="none" strike="noStrike">
                 <a:solidFill>
                   <a:schemeClr val="dk1"/>
@@ -9020,7 +9495,7 @@
         <p:spPr>
           <a:xfrm>
             <a:off x="720000" y="4680000"/>
-            <a:ext cx="6118920" cy="5038920"/>
+            <a:ext cx="6118560" cy="5038560"/>
           </a:xfrm>
           <a:prstGeom prst="rect">
             <a:avLst/>
@@ -9341,7 +9816,7 @@
         <p:spPr>
           <a:xfrm>
             <a:off x="720000" y="900000"/>
-            <a:ext cx="6118920" cy="3440520"/>
+            <a:ext cx="6118560" cy="3440160"/>
           </a:xfrm>
           <a:prstGeom prst="rect">
             <a:avLst/>
@@ -9364,7 +9839,7 @@
         <p:spPr>
           <a:xfrm>
             <a:off x="5940000" y="10080000"/>
-            <a:ext cx="898920" cy="358920"/>
+            <a:ext cx="898560" cy="358560"/>
           </a:xfrm>
           <a:prstGeom prst="rect">
             <a:avLst/>
@@ -9408,7 +9883,7 @@
                 <a:tab pos="0" algn="l"/>
               </a:tabLst>
             </a:pPr>
-            <a:fld id="{C2073457-D7EE-4C1E-982B-CD91601EE5E7}" type="slidenum">
+            <a:fld id="{2D8C350D-A38A-4552-AAB6-4EBACACBCBAF}" type="slidenum">
               <a:rPr lang="en-US" sz="1800" b="0" u="none" strike="noStrike">
                 <a:solidFill>
                   <a:schemeClr val="dk1"/>
@@ -9418,7 +9893,7 @@
                 <a:latin typeface="+mn-lt"/>
                 <a:ea typeface="+mn-ea"/>
               </a:rPr>
-              <a:t>&lt;Foliennummer&gt;</a:t>
+              <a:t>1</a:t>
             </a:fld>
             <a:endParaRPr lang="de-DE" sz="1800" b="0" u="none" strike="noStrike">
               <a:solidFill>
@@ -9444,7 +9919,7 @@
         <p:spPr>
           <a:xfrm>
             <a:off x="720000" y="4680000"/>
-            <a:ext cx="6118920" cy="5038920"/>
+            <a:ext cx="6118560" cy="5038560"/>
           </a:xfrm>
           <a:prstGeom prst="rect">
             <a:avLst/>
@@ -9776,7 +10251,7 @@
         <p:spPr>
           <a:xfrm>
             <a:off x="720000" y="900000"/>
-            <a:ext cx="6118920" cy="3440520"/>
+            <a:ext cx="6118560" cy="3440160"/>
           </a:xfrm>
           <a:prstGeom prst="rect">
             <a:avLst/>
@@ -9799,7 +10274,7 @@
         <p:spPr>
           <a:xfrm>
             <a:off x="5940000" y="10080000"/>
-            <a:ext cx="898920" cy="358920"/>
+            <a:ext cx="898560" cy="358560"/>
           </a:xfrm>
           <a:prstGeom prst="rect">
             <a:avLst/>
@@ -9843,7 +10318,7 @@
                 <a:tab pos="0" algn="l"/>
               </a:tabLst>
             </a:pPr>
-            <a:fld id="{A839A3FE-1CA9-463D-8315-7AE197259FE2}" type="slidenum">
+            <a:fld id="{9C2E6DA9-37D2-4367-9DDA-3FAB26B98F51}" type="slidenum">
               <a:rPr lang="en-US" sz="1800" b="0" u="none" strike="noStrike">
                 <a:solidFill>
                   <a:schemeClr val="dk1"/>
@@ -9879,7 +10354,7 @@
         <p:spPr>
           <a:xfrm>
             <a:off x="720000" y="4680000"/>
-            <a:ext cx="6118920" cy="5038920"/>
+            <a:ext cx="6118560" cy="5038560"/>
           </a:xfrm>
           <a:prstGeom prst="rect">
             <a:avLst/>
@@ -10110,7 +10585,7 @@
         <p:spPr>
           <a:xfrm>
             <a:off x="720000" y="900000"/>
-            <a:ext cx="6118920" cy="3440520"/>
+            <a:ext cx="6118560" cy="3440160"/>
           </a:xfrm>
           <a:prstGeom prst="rect">
             <a:avLst/>
@@ -10133,7 +10608,7 @@
         <p:spPr>
           <a:xfrm>
             <a:off x="5940000" y="10080000"/>
-            <a:ext cx="898920" cy="358920"/>
+            <a:ext cx="898560" cy="358560"/>
           </a:xfrm>
           <a:prstGeom prst="rect">
             <a:avLst/>
@@ -10177,7 +10652,7 @@
                 <a:tab pos="0" algn="l"/>
               </a:tabLst>
             </a:pPr>
-            <a:fld id="{F19E5432-694C-426C-94A9-DAD9E4AD9DA1}" type="slidenum">
+            <a:fld id="{48E6545E-2395-48C0-97A1-DB5C0C984D32}" type="slidenum">
               <a:rPr lang="en-US" sz="1800" b="0" u="none" strike="noStrike">
                 <a:solidFill>
                   <a:schemeClr val="dk1"/>
@@ -10213,7 +10688,7 @@
         <p:spPr>
           <a:xfrm>
             <a:off x="720000" y="4680000"/>
-            <a:ext cx="6118920" cy="5038920"/>
+            <a:ext cx="6118560" cy="5038560"/>
           </a:xfrm>
           <a:prstGeom prst="rect">
             <a:avLst/>
@@ -10444,7 +10919,7 @@
         <p:spPr>
           <a:xfrm>
             <a:off x="720000" y="900000"/>
-            <a:ext cx="6118920" cy="3440520"/>
+            <a:ext cx="6118560" cy="3440160"/>
           </a:xfrm>
           <a:prstGeom prst="rect">
             <a:avLst/>
@@ -10467,7 +10942,7 @@
         <p:spPr>
           <a:xfrm>
             <a:off x="5940000" y="10080000"/>
-            <a:ext cx="898920" cy="358920"/>
+            <a:ext cx="898560" cy="358560"/>
           </a:xfrm>
           <a:prstGeom prst="rect">
             <a:avLst/>
@@ -10511,7 +10986,7 @@
                 <a:tab pos="0" algn="l"/>
               </a:tabLst>
             </a:pPr>
-            <a:fld id="{80C23B1A-0CA9-4163-8E9C-3F2F624DC116}" type="slidenum">
+            <a:fld id="{DD7AF6DF-4EAB-475A-859A-394386168132}" type="slidenum">
               <a:rPr lang="en-US" sz="1800" b="0" u="none" strike="noStrike">
                 <a:solidFill>
                   <a:schemeClr val="dk1"/>
@@ -10547,7 +11022,7 @@
         <p:spPr>
           <a:xfrm>
             <a:off x="720000" y="4680000"/>
-            <a:ext cx="6118920" cy="5038920"/>
+            <a:ext cx="6118560" cy="5038560"/>
           </a:xfrm>
           <a:prstGeom prst="rect">
             <a:avLst/>
@@ -10845,7 +11320,7 @@
         <p:spPr>
           <a:xfrm>
             <a:off x="457200" y="-36000"/>
-            <a:ext cx="8228520" cy="1341000"/>
+            <a:ext cx="8228160" cy="1341000"/>
           </a:xfrm>
           <a:prstGeom prst="rect">
             <a:avLst/>
@@ -10897,7 +11372,18 @@
                 <a:uFillTx/>
                 <a:latin typeface="Arial"/>
               </a:rPr>
-              <a:t>Format des Titeltextes durch Klicken bearbeiten</a:t>
+              <a:t>Format des Titeltextes durch </a:t>
+            </a:r>
+            <a:r>
+              <a:rPr lang="de-DE" sz="4400" b="0" u="none" strike="noStrike">
+                <a:solidFill>
+                  <a:srgbClr val="000000"/>
+                </a:solidFill>
+                <a:effectLst/>
+                <a:uFillTx/>
+                <a:latin typeface="Arial"/>
+              </a:rPr>
+              <a:t>Klicken bearbeiten</a:t>
             </a:r>
             <a:endParaRPr lang="de-DE" sz="4400" b="0" u="none" strike="noStrike">
               <a:solidFill>
@@ -10952,7 +11438,7 @@
         <p:spPr>
           <a:xfrm>
             <a:off x="457200" y="205200"/>
-            <a:ext cx="8228880" cy="858240"/>
+            <a:ext cx="8228520" cy="857880"/>
           </a:xfrm>
           <a:prstGeom prst="rect">
             <a:avLst/>
@@ -11004,7 +11490,18 @@
                 <a:uFillTx/>
                 <a:latin typeface="Arial"/>
               </a:rPr>
-              <a:t>Format des Titeltextes durch Klicken bearbeiten</a:t>
+              <a:t>Format des Titeltextes </a:t>
+            </a:r>
+            <a:r>
+              <a:rPr lang="de-DE" sz="4400" b="0" u="none" strike="noStrike">
+                <a:solidFill>
+                  <a:srgbClr val="000000"/>
+                </a:solidFill>
+                <a:effectLst/>
+                <a:uFillTx/>
+                <a:latin typeface="Arial"/>
+              </a:rPr>
+              <a:t>durch Klicken bearbeiten</a:t>
             </a:r>
             <a:endParaRPr lang="de-DE" sz="4400" b="0" u="none" strike="noStrike">
               <a:solidFill>
@@ -11030,7 +11527,7 @@
         <p:spPr>
           <a:xfrm>
             <a:off x="457200" y="1203480"/>
-            <a:ext cx="8228880" cy="2982600"/>
+            <a:ext cx="8228520" cy="2982240"/>
           </a:xfrm>
           <a:prstGeom prst="rect">
             <a:avLst/>
@@ -11454,7 +11951,7 @@
 
 <file path=ppt/slideLayouts/slideLayout3.xml><?xml version="1.0" encoding="utf-8"?>
 <p:sldLayout xmlns:a="http://schemas.openxmlformats.org/drawingml/2006/main" xmlns:p="http://schemas.openxmlformats.org/presentationml/2006/main" xmlns:r="http://schemas.openxmlformats.org/officeDocument/2006/relationships" xmlns:p14="http://schemas.microsoft.com/office/powerpoint/2010/main" xmlns:p15="http://schemas.microsoft.com/office/powerpoint/2012/main" xmlns:mc="http://schemas.openxmlformats.org/markup-compatibility/2006" type="blank" preserve="1">
-  <p:cSld name="Standard 1">
+  <p:cSld name="Standard 2">
     <p:bg>
       <p:bgPr>
         <a:solidFill>
@@ -11489,7 +11986,7 @@
         <p:spPr>
           <a:xfrm>
             <a:off x="457200" y="205200"/>
-            <a:ext cx="8228880" cy="858240"/>
+            <a:ext cx="8228520" cy="857880"/>
           </a:xfrm>
           <a:prstGeom prst="rect">
             <a:avLst/>
@@ -11567,7 +12064,7 @@
         <p:spPr>
           <a:xfrm>
             <a:off x="457200" y="1203480"/>
-            <a:ext cx="8228880" cy="2982600"/>
+            <a:ext cx="8228520" cy="2982240"/>
           </a:xfrm>
           <a:prstGeom prst="rect">
             <a:avLst/>
@@ -11991,7 +12488,7 @@
 
 <file path=ppt/slideLayouts/slideLayout4.xml><?xml version="1.0" encoding="utf-8"?>
 <p:sldLayout xmlns:a="http://schemas.openxmlformats.org/drawingml/2006/main" xmlns:p="http://schemas.openxmlformats.org/presentationml/2006/main" xmlns:r="http://schemas.openxmlformats.org/officeDocument/2006/relationships" xmlns:p14="http://schemas.microsoft.com/office/powerpoint/2010/main" xmlns:p15="http://schemas.microsoft.com/office/powerpoint/2012/main" xmlns:mc="http://schemas.openxmlformats.org/markup-compatibility/2006" type="title" preserve="1">
-  <p:cSld name="Standard 2">
+  <p:cSld name="Standard 3">
     <p:spTree>
       <p:nvGrpSpPr>
         <p:cNvPr id="1" name=""/>
@@ -12019,7 +12516,7 @@
         <p:spPr>
           <a:xfrm>
             <a:off x="457200" y="205200"/>
-            <a:ext cx="8228880" cy="858240"/>
+            <a:ext cx="8228520" cy="857880"/>
           </a:xfrm>
           <a:prstGeom prst="rect">
             <a:avLst/>
@@ -12064,7 +12561,7 @@
         <p:spPr>
           <a:xfrm>
             <a:off x="457200" y="1203480"/>
-            <a:ext cx="8228880" cy="2982600"/>
+            <a:ext cx="8228520" cy="2982240"/>
           </a:xfrm>
           <a:prstGeom prst="rect">
             <a:avLst/>
@@ -12126,7 +12623,7 @@
 </p:sldMaster>
 </file>
 
-<file path=ppt/slideMasters/slideMaster3.xml><?xml version="1.0" encoding="utf-8"?>
+<file path=ppt/slideMasters/slideMaster4.xml><?xml version="1.0" encoding="utf-8"?>
 <p:sldMaster xmlns:a="http://schemas.openxmlformats.org/drawingml/2006/main" xmlns:p="http://schemas.openxmlformats.org/presentationml/2006/main" xmlns:r="http://schemas.openxmlformats.org/officeDocument/2006/relationships" xmlns:p14="http://schemas.microsoft.com/office/powerpoint/2010/main" xmlns:p15="http://schemas.microsoft.com/office/powerpoint/2012/main" xmlns:mc="http://schemas.openxmlformats.org/markup-compatibility/2006">
   <p:cSld>
     <p:bg>
@@ -12163,7 +12660,7 @@
         <p:spPr>
           <a:xfrm>
             <a:off x="457200" y="496800"/>
-            <a:ext cx="8228880" cy="274680"/>
+            <a:ext cx="8228520" cy="274680"/>
           </a:xfrm>
           <a:prstGeom prst="rect">
             <a:avLst/>
@@ -12646,7 +13143,7 @@
         <p:spPr>
           <a:xfrm>
             <a:off x="6949440" y="2011680"/>
-            <a:ext cx="2371320" cy="359640"/>
+            <a:ext cx="2370960" cy="359280"/>
           </a:xfrm>
           <a:prstGeom prst="parallelogram">
             <a:avLst>
@@ -12694,7 +13191,7 @@
         <p:spPr>
           <a:xfrm>
             <a:off x="6400800" y="2560320"/>
-            <a:ext cx="2919960" cy="405360"/>
+            <a:ext cx="2919600" cy="405000"/>
           </a:xfrm>
           <a:prstGeom prst="parallelogram">
             <a:avLst>
@@ -12744,7 +13241,7 @@
         <p:spPr>
           <a:xfrm>
             <a:off x="180000" y="1260000"/>
-            <a:ext cx="3956760" cy="908280"/>
+            <a:ext cx="3956400" cy="907920"/>
           </a:xfrm>
           <a:prstGeom prst="rect">
             <a:avLst/>
@@ -12869,7 +13366,7 @@
         <p:spPr>
           <a:xfrm>
             <a:off x="4176000" y="144000"/>
-            <a:ext cx="4856760" cy="4856760"/>
+            <a:ext cx="4856400" cy="4856400"/>
           </a:xfrm>
           <a:prstGeom prst="rect">
             <a:avLst/>
@@ -12926,7 +13423,7 @@
         <p:spPr>
           <a:xfrm>
             <a:off x="457200" y="274320"/>
-            <a:ext cx="8224200" cy="634680"/>
+            <a:ext cx="8223840" cy="634320"/>
           </a:xfrm>
           <a:prstGeom prst="rect">
             <a:avLst/>
@@ -12987,7 +13484,7 @@
         <p:spPr>
           <a:xfrm>
             <a:off x="388800" y="1460160"/>
-            <a:ext cx="1914840" cy="2554920"/>
+            <a:ext cx="1914480" cy="2554560"/>
           </a:xfrm>
           <a:prstGeom prst="roundRect">
             <a:avLst>
@@ -13040,7 +13537,7 @@
         <p:spPr>
           <a:xfrm>
             <a:off x="388800" y="1643040"/>
-            <a:ext cx="1914840" cy="1091880"/>
+            <a:ext cx="1914480" cy="1091520"/>
           </a:xfrm>
           <a:prstGeom prst="rect">
             <a:avLst/>
@@ -13101,7 +13598,7 @@
         <p:spPr>
           <a:xfrm>
             <a:off x="388800" y="2831760"/>
-            <a:ext cx="1914840" cy="360360"/>
+            <a:ext cx="1914480" cy="360000"/>
           </a:xfrm>
           <a:prstGeom prst="rect">
             <a:avLst/>
@@ -13162,7 +13659,7 @@
         <p:spPr>
           <a:xfrm>
             <a:off x="388800" y="3243240"/>
-            <a:ext cx="1914840" cy="360360"/>
+            <a:ext cx="1914480" cy="360000"/>
           </a:xfrm>
           <a:prstGeom prst="rect">
             <a:avLst/>
@@ -13223,7 +13720,7 @@
         <p:spPr>
           <a:xfrm>
             <a:off x="2537640" y="1460160"/>
-            <a:ext cx="1914840" cy="2554920"/>
+            <a:ext cx="1914480" cy="2554560"/>
           </a:xfrm>
           <a:prstGeom prst="roundRect">
             <a:avLst>
@@ -13276,7 +13773,7 @@
         <p:spPr>
           <a:xfrm>
             <a:off x="2537640" y="1643040"/>
-            <a:ext cx="1914840" cy="1091880"/>
+            <a:ext cx="1914480" cy="1091520"/>
           </a:xfrm>
           <a:prstGeom prst="rect">
             <a:avLst/>
@@ -13337,7 +13834,7 @@
         <p:spPr>
           <a:xfrm>
             <a:off x="2537640" y="2831760"/>
-            <a:ext cx="1914840" cy="360360"/>
+            <a:ext cx="1914480" cy="360000"/>
           </a:xfrm>
           <a:prstGeom prst="rect">
             <a:avLst/>
@@ -13398,7 +13895,7 @@
         <p:spPr>
           <a:xfrm>
             <a:off x="2537640" y="3243240"/>
-            <a:ext cx="1914840" cy="360360"/>
+            <a:ext cx="1914480" cy="360000"/>
           </a:xfrm>
           <a:prstGeom prst="rect">
             <a:avLst/>
@@ -13459,7 +13956,7 @@
         <p:spPr>
           <a:xfrm>
             <a:off x="4686480" y="1460160"/>
-            <a:ext cx="1914840" cy="2554920"/>
+            <a:ext cx="1914480" cy="2554560"/>
           </a:xfrm>
           <a:prstGeom prst="roundRect">
             <a:avLst>
@@ -13512,7 +14009,7 @@
         <p:spPr>
           <a:xfrm>
             <a:off x="4686480" y="1643040"/>
-            <a:ext cx="1914840" cy="1091880"/>
+            <a:ext cx="1914480" cy="1091520"/>
           </a:xfrm>
           <a:prstGeom prst="rect">
             <a:avLst/>
@@ -13573,7 +14070,7 @@
         <p:spPr>
           <a:xfrm>
             <a:off x="4686480" y="2831760"/>
-            <a:ext cx="1914840" cy="360360"/>
+            <a:ext cx="1914480" cy="360000"/>
           </a:xfrm>
           <a:prstGeom prst="rect">
             <a:avLst/>
@@ -13634,7 +14131,7 @@
         <p:spPr>
           <a:xfrm>
             <a:off x="4686480" y="3243240"/>
-            <a:ext cx="1914840" cy="360360"/>
+            <a:ext cx="1914480" cy="360000"/>
           </a:xfrm>
           <a:prstGeom prst="rect">
             <a:avLst/>
@@ -13695,7 +14192,7 @@
         <p:spPr>
           <a:xfrm>
             <a:off x="6835320" y="1460160"/>
-            <a:ext cx="1914840" cy="2554920"/>
+            <a:ext cx="1914480" cy="2554560"/>
           </a:xfrm>
           <a:prstGeom prst="roundRect">
             <a:avLst>
@@ -13748,7 +14245,7 @@
         <p:spPr>
           <a:xfrm>
             <a:off x="6835320" y="1643040"/>
-            <a:ext cx="1914840" cy="1091880"/>
+            <a:ext cx="1914480" cy="1091520"/>
           </a:xfrm>
           <a:prstGeom prst="rect">
             <a:avLst/>
@@ -13809,7 +14306,7 @@
         <p:spPr>
           <a:xfrm>
             <a:off x="6835320" y="2831760"/>
-            <a:ext cx="1914840" cy="360360"/>
+            <a:ext cx="1914480" cy="360000"/>
           </a:xfrm>
           <a:prstGeom prst="rect">
             <a:avLst/>
@@ -13870,7 +14367,7 @@
         <p:spPr>
           <a:xfrm>
             <a:off x="6835320" y="3243240"/>
-            <a:ext cx="1914840" cy="360360"/>
+            <a:ext cx="1914480" cy="360000"/>
           </a:xfrm>
           <a:prstGeom prst="rect">
             <a:avLst/>
@@ -13931,7 +14428,7 @@
         <p:spPr>
           <a:xfrm>
             <a:off x="365760" y="4864680"/>
-            <a:ext cx="6852600" cy="223200"/>
+            <a:ext cx="6852240" cy="222840"/>
           </a:xfrm>
           <a:prstGeom prst="rect">
             <a:avLst/>
@@ -13992,7 +14489,7 @@
         <p:spPr>
           <a:xfrm>
             <a:off x="7772400" y="4864680"/>
-            <a:ext cx="1000440" cy="223200"/>
+            <a:ext cx="1000080" cy="222840"/>
           </a:xfrm>
           <a:prstGeom prst="rect">
             <a:avLst/>
@@ -14624,7 +15121,7 @@
         <p:spPr>
           <a:xfrm>
             <a:off x="6949440" y="457200"/>
-            <a:ext cx="2371320" cy="313920"/>
+            <a:ext cx="2370960" cy="313560"/>
           </a:xfrm>
           <a:prstGeom prst="parallelogram">
             <a:avLst>
@@ -14672,7 +15169,7 @@
         <p:spPr>
           <a:xfrm>
             <a:off x="457200" y="1188720"/>
-            <a:ext cx="8223480" cy="999720"/>
+            <a:ext cx="8223120" cy="999360"/>
           </a:xfrm>
           <a:prstGeom prst="rect">
             <a:avLst/>
@@ -14733,7 +15230,7 @@
         <p:spPr>
           <a:xfrm>
             <a:off x="4023360" y="2468880"/>
-            <a:ext cx="1091160" cy="1091160"/>
+            <a:ext cx="1090800" cy="1090800"/>
           </a:xfrm>
           <a:prstGeom prst="ellipse">
             <a:avLst/>
@@ -14778,8 +15275,8 @@
         </p:nvSpPr>
         <p:spPr>
           <a:xfrm rot="5400000">
-            <a:off x="4342320" y="2715480"/>
-            <a:ext cx="588240" cy="598320"/>
+            <a:off x="4342680" y="2715480"/>
+            <a:ext cx="587880" cy="597960"/>
           </a:xfrm>
           <a:prstGeom prst="triangle">
             <a:avLst>
@@ -14827,7 +15324,7 @@
         <p:spPr>
           <a:xfrm>
             <a:off x="457200" y="3931920"/>
-            <a:ext cx="8223480" cy="359640"/>
+            <a:ext cx="8223120" cy="359280"/>
           </a:xfrm>
           <a:prstGeom prst="rect">
             <a:avLst/>
@@ -14948,7 +15445,7 @@
         <p:spPr>
           <a:xfrm>
             <a:off x="365760" y="4864680"/>
-            <a:ext cx="6851880" cy="222480"/>
+            <a:ext cx="6851520" cy="222120"/>
           </a:xfrm>
           <a:prstGeom prst="rect">
             <a:avLst/>
@@ -15009,7 +15506,7 @@
         <p:spPr>
           <a:xfrm>
             <a:off x="7772400" y="4864680"/>
-            <a:ext cx="999720" cy="222480"/>
+            <a:ext cx="999360" cy="222120"/>
           </a:xfrm>
           <a:prstGeom prst="rect">
             <a:avLst/>
@@ -15107,7 +15604,7 @@
         <p:spPr>
           <a:xfrm>
             <a:off x="457200" y="274320"/>
-            <a:ext cx="8223480" cy="633960"/>
+            <a:ext cx="8223120" cy="633600"/>
           </a:xfrm>
           <a:prstGeom prst="rect">
             <a:avLst/>
@@ -15168,7 +15665,7 @@
         <p:spPr>
           <a:xfrm>
             <a:off x="5852160" y="1097280"/>
-            <a:ext cx="2919960" cy="3011400"/>
+            <a:ext cx="2919600" cy="3011040"/>
           </a:xfrm>
           <a:prstGeom prst="roundRect">
             <a:avLst>
@@ -15221,7 +15718,7 @@
         <p:spPr>
           <a:xfrm>
             <a:off x="5989320" y="1188720"/>
-            <a:ext cx="2645640" cy="268200"/>
+            <a:ext cx="2645280" cy="267840"/>
           </a:xfrm>
           <a:prstGeom prst="rect">
             <a:avLst/>
@@ -15282,7 +15779,7 @@
         <p:spPr>
           <a:xfrm>
             <a:off x="5989320" y="1463040"/>
-            <a:ext cx="2645640" cy="359640"/>
+            <a:ext cx="2645280" cy="359280"/>
           </a:xfrm>
           <a:prstGeom prst="rect">
             <a:avLst/>
@@ -15343,7 +15840,7 @@
         <p:spPr>
           <a:xfrm>
             <a:off x="5989320" y="2011680"/>
-            <a:ext cx="2645640" cy="1091160"/>
+            <a:ext cx="2645280" cy="1090800"/>
           </a:xfrm>
           <a:prstGeom prst="rect">
             <a:avLst/>
@@ -15557,7 +16054,7 @@
         <p:spPr>
           <a:xfrm>
             <a:off x="5989320" y="3291840"/>
-            <a:ext cx="2645640" cy="633960"/>
+            <a:ext cx="2645280" cy="633600"/>
           </a:xfrm>
           <a:prstGeom prst="rect">
             <a:avLst/>
@@ -15618,7 +16115,7 @@
         <p:spPr>
           <a:xfrm>
             <a:off x="365760" y="4864680"/>
-            <a:ext cx="6851880" cy="222480"/>
+            <a:ext cx="6851520" cy="222120"/>
           </a:xfrm>
           <a:prstGeom prst="rect">
             <a:avLst/>
@@ -15679,7 +16176,7 @@
         <p:spPr>
           <a:xfrm>
             <a:off x="7772400" y="4864680"/>
-            <a:ext cx="999720" cy="222480"/>
+            <a:ext cx="999360" cy="222120"/>
           </a:xfrm>
           <a:prstGeom prst="rect">
             <a:avLst/>
@@ -15740,7 +16237,7 @@
         <p:spPr>
           <a:xfrm>
             <a:off x="412920" y="2410560"/>
-            <a:ext cx="354240" cy="354240"/>
+            <a:ext cx="353880" cy="353880"/>
           </a:xfrm>
           <a:prstGeom prst="rect">
             <a:avLst/>
@@ -15789,7 +16286,7 @@
         <p:spPr>
           <a:xfrm>
             <a:off x="573480" y="2516400"/>
-            <a:ext cx="174240" cy="94680"/>
+            <a:ext cx="173880" cy="94320"/>
           </a:xfrm>
           <a:prstGeom prst="rect">
             <a:avLst/>
@@ -15809,7 +16306,7 @@
         <p:spPr>
           <a:xfrm>
             <a:off x="1001520" y="3230280"/>
-            <a:ext cx="354240" cy="354240"/>
+            <a:ext cx="353880" cy="353880"/>
           </a:xfrm>
           <a:prstGeom prst="rect">
             <a:avLst/>
@@ -15858,7 +16355,7 @@
         <p:spPr>
           <a:xfrm>
             <a:off x="1162080" y="3336120"/>
-            <a:ext cx="174240" cy="94680"/>
+            <a:ext cx="173880" cy="94320"/>
           </a:xfrm>
           <a:prstGeom prst="rect">
             <a:avLst/>
@@ -15877,7 +16374,7 @@
         </p:nvGraphicFramePr>
         <p:xfrm>
           <a:off x="457560" y="1177200"/>
-          <a:ext cx="5297760" cy="3011760"/>
+          <a:ext cx="5297400" cy="3011400"/>
         </p:xfrm>
         <a:graphic>
           <a:graphicData uri="http://schemas.openxmlformats.org/drawingml/2006/chart">
@@ -15894,7 +16391,7 @@
         <p:spPr>
           <a:xfrm>
             <a:off x="784440" y="3310920"/>
-            <a:ext cx="354240" cy="354240"/>
+            <a:ext cx="353880" cy="353880"/>
           </a:xfrm>
           <a:prstGeom prst="rect">
             <a:avLst/>
@@ -15943,7 +16440,7 @@
         <p:spPr>
           <a:xfrm>
             <a:off x="945000" y="3416760"/>
-            <a:ext cx="174240" cy="94680"/>
+            <a:ext cx="173880" cy="94320"/>
           </a:xfrm>
           <a:prstGeom prst="rect">
             <a:avLst/>
@@ -15963,7 +16460,7 @@
         <p:spPr>
           <a:xfrm>
             <a:off x="412920" y="2410560"/>
-            <a:ext cx="354240" cy="354240"/>
+            <a:ext cx="353880" cy="353880"/>
           </a:xfrm>
           <a:prstGeom prst="rect">
             <a:avLst/>
@@ -16012,7 +16509,7 @@
         <p:spPr>
           <a:xfrm>
             <a:off x="573480" y="2516400"/>
-            <a:ext cx="174240" cy="94680"/>
+            <a:ext cx="173880" cy="94320"/>
           </a:xfrm>
           <a:prstGeom prst="rect">
             <a:avLst/>
@@ -16032,7 +16529,7 @@
         <p:spPr>
           <a:xfrm>
             <a:off x="457560" y="925920"/>
-            <a:ext cx="5300280" cy="167040"/>
+            <a:ext cx="5299920" cy="167040"/>
           </a:xfrm>
           <a:prstGeom prst="rect">
             <a:avLst/>
@@ -16090,7 +16587,7 @@
         <p:spPr>
           <a:xfrm>
             <a:off x="1005840" y="4227480"/>
-            <a:ext cx="4751640" cy="167040"/>
+            <a:ext cx="4751280" cy="167040"/>
           </a:xfrm>
           <a:prstGeom prst="rect">
             <a:avLst/>
@@ -16395,7 +16892,7 @@
         <p:spPr>
           <a:xfrm>
             <a:off x="457200" y="274320"/>
-            <a:ext cx="8223480" cy="633960"/>
+            <a:ext cx="8223120" cy="633600"/>
           </a:xfrm>
           <a:prstGeom prst="rect">
             <a:avLst/>
@@ -16461,7 +16958,7 @@
         </p:nvGraphicFramePr>
         <p:xfrm>
           <a:off x="457200" y="1097280"/>
-          <a:ext cx="7766280" cy="3194280"/>
+          <a:ext cx="7765920" cy="3193920"/>
         </p:xfrm>
         <a:graphic>
           <a:graphicData uri="http://schemas.openxmlformats.org/drawingml/2006/chart">
@@ -16478,7 +16975,7 @@
         <p:spPr>
           <a:xfrm>
             <a:off x="365760" y="4864680"/>
-            <a:ext cx="6851880" cy="222480"/>
+            <a:ext cx="6851520" cy="222120"/>
           </a:xfrm>
           <a:prstGeom prst="rect">
             <a:avLst/>
@@ -16539,7 +17036,7 @@
         <p:spPr>
           <a:xfrm>
             <a:off x="7772400" y="4864680"/>
-            <a:ext cx="999720" cy="222480"/>
+            <a:ext cx="999360" cy="222120"/>
           </a:xfrm>
           <a:prstGeom prst="rect">
             <a:avLst/>
@@ -16600,7 +17097,7 @@
         <p:spPr>
           <a:xfrm>
             <a:off x="468720" y="3497400"/>
-            <a:ext cx="1642320" cy="354240"/>
+            <a:ext cx="1641960" cy="353880"/>
           </a:xfrm>
           <a:prstGeom prst="rect">
             <a:avLst/>
@@ -16666,7 +17163,7 @@
         <p:spPr>
           <a:xfrm>
             <a:off x="914760" y="3627360"/>
-            <a:ext cx="174240" cy="94680"/>
+            <a:ext cx="173880" cy="94320"/>
           </a:xfrm>
           <a:prstGeom prst="rect">
             <a:avLst/>
@@ -16685,7 +17182,7 @@
         </p:nvGraphicFramePr>
         <p:xfrm>
           <a:off x="685800" y="1096920"/>
-          <a:ext cx="7766640" cy="3194640"/>
+          <a:ext cx="7766280" cy="3194280"/>
         </p:xfrm>
         <a:graphic>
           <a:graphicData uri="http://schemas.openxmlformats.org/drawingml/2006/chart">
@@ -16702,7 +17199,7 @@
         <p:spPr>
           <a:xfrm>
             <a:off x="691920" y="3499200"/>
-            <a:ext cx="354240" cy="354240"/>
+            <a:ext cx="353880" cy="353880"/>
           </a:xfrm>
           <a:prstGeom prst="rect">
             <a:avLst/>
@@ -16751,7 +17248,7 @@
         <p:spPr>
           <a:xfrm>
             <a:off x="852480" y="3605040"/>
-            <a:ext cx="174240" cy="94680"/>
+            <a:ext cx="173880" cy="94320"/>
           </a:xfrm>
           <a:prstGeom prst="rect">
             <a:avLst/>
@@ -16771,7 +17268,7 @@
         <p:spPr>
           <a:xfrm>
             <a:off x="457560" y="925920"/>
-            <a:ext cx="7769160" cy="167040"/>
+            <a:ext cx="7768800" cy="167040"/>
           </a:xfrm>
           <a:prstGeom prst="rect">
             <a:avLst/>
@@ -16829,7 +17326,7 @@
         <p:spPr>
           <a:xfrm>
             <a:off x="71280" y="4300920"/>
-            <a:ext cx="7129080" cy="167040"/>
+            <a:ext cx="7128720" cy="167040"/>
           </a:xfrm>
           <a:prstGeom prst="rect">
             <a:avLst/>
@@ -16924,7 +17421,7 @@
         <p:spPr>
           <a:xfrm>
             <a:off x="457200" y="274320"/>
-            <a:ext cx="8223480" cy="633960"/>
+            <a:ext cx="8223120" cy="633600"/>
           </a:xfrm>
           <a:prstGeom prst="rect">
             <a:avLst/>
@@ -16984,7 +17481,7 @@
         </p:nvGraphicFramePr>
         <p:xfrm>
           <a:off x="457200" y="1368720"/>
-          <a:ext cx="5480280" cy="2554200"/>
+          <a:ext cx="5479920" cy="2553840"/>
         </p:xfrm>
         <a:graphic>
           <a:graphicData uri="http://schemas.openxmlformats.org/drawingml/2006/chart">
@@ -17001,7 +17498,7 @@
         <p:spPr>
           <a:xfrm>
             <a:off x="6217920" y="1800000"/>
-            <a:ext cx="2554200" cy="1091160"/>
+            <a:ext cx="2553840" cy="1090800"/>
           </a:xfrm>
           <a:prstGeom prst="rect">
             <a:avLst/>
@@ -17062,7 +17559,7 @@
         <p:spPr>
           <a:xfrm>
             <a:off x="6217920" y="2897280"/>
-            <a:ext cx="2554200" cy="359640"/>
+            <a:ext cx="2553840" cy="359280"/>
           </a:xfrm>
           <a:prstGeom prst="rect">
             <a:avLst/>
@@ -17123,7 +17620,7 @@
         <p:spPr>
           <a:xfrm>
             <a:off x="365760" y="4864680"/>
-            <a:ext cx="6851880" cy="222480"/>
+            <a:ext cx="6851520" cy="222120"/>
           </a:xfrm>
           <a:prstGeom prst="rect">
             <a:avLst/>
@@ -17184,7 +17681,7 @@
         <p:spPr>
           <a:xfrm>
             <a:off x="7772400" y="4864680"/>
-            <a:ext cx="999720" cy="222480"/>
+            <a:ext cx="999360" cy="222120"/>
           </a:xfrm>
           <a:prstGeom prst="rect">
             <a:avLst/>
@@ -17245,7 +17742,7 @@
         <p:spPr>
           <a:xfrm>
             <a:off x="666000" y="1801080"/>
-            <a:ext cx="1627560" cy="355320"/>
+            <a:ext cx="1627200" cy="354960"/>
           </a:xfrm>
           <a:prstGeom prst="rect">
             <a:avLst/>
@@ -17307,7 +17804,7 @@
         <p:spPr>
           <a:xfrm>
             <a:off x="783720" y="1813320"/>
-            <a:ext cx="1615320" cy="288000"/>
+            <a:ext cx="1614960" cy="288000"/>
           </a:xfrm>
           <a:prstGeom prst="rect">
             <a:avLst/>
@@ -17365,7 +17862,7 @@
         <p:spPr>
           <a:xfrm>
             <a:off x="457560" y="1105920"/>
-            <a:ext cx="5483160" cy="167040"/>
+            <a:ext cx="5482800" cy="167040"/>
           </a:xfrm>
           <a:prstGeom prst="rect">
             <a:avLst/>
@@ -17423,7 +17920,7 @@
         <p:spPr>
           <a:xfrm>
             <a:off x="3334680" y="3925800"/>
-            <a:ext cx="1000800" cy="257400"/>
+            <a:ext cx="1000440" cy="257400"/>
           </a:xfrm>
           <a:prstGeom prst="rect">
             <a:avLst/>
@@ -17620,7 +18117,7 @@
         <p:spPr>
           <a:xfrm>
             <a:off x="457200" y="274320"/>
-            <a:ext cx="8223480" cy="633960"/>
+            <a:ext cx="8223120" cy="633600"/>
           </a:xfrm>
           <a:prstGeom prst="rect">
             <a:avLst/>
@@ -17681,7 +18178,7 @@
         <p:spPr>
           <a:xfrm>
             <a:off x="5577840" y="1321560"/>
-            <a:ext cx="3194280" cy="2279880"/>
+            <a:ext cx="3193920" cy="2279520"/>
           </a:xfrm>
           <a:prstGeom prst="roundRect">
             <a:avLst>
@@ -17734,7 +18231,7 @@
         <p:spPr>
           <a:xfrm>
             <a:off x="5715000" y="1394640"/>
-            <a:ext cx="2919960" cy="268200"/>
+            <a:ext cx="2919600" cy="267840"/>
           </a:xfrm>
           <a:prstGeom prst="rect">
             <a:avLst/>
@@ -19114,7 +19611,7 @@
         <p:spPr>
           <a:xfrm>
             <a:off x="365760" y="4864680"/>
-            <a:ext cx="6851880" cy="222480"/>
+            <a:ext cx="6851520" cy="222120"/>
           </a:xfrm>
           <a:prstGeom prst="rect">
             <a:avLst/>
@@ -19175,7 +19672,7 @@
         <p:spPr>
           <a:xfrm>
             <a:off x="7772400" y="4864680"/>
-            <a:ext cx="999720" cy="222480"/>
+            <a:ext cx="999360" cy="222120"/>
           </a:xfrm>
           <a:prstGeom prst="rect">
             <a:avLst/>
@@ -19236,7 +19733,7 @@
         <p:spPr>
           <a:xfrm>
             <a:off x="510840" y="1440000"/>
-            <a:ext cx="354240" cy="354240"/>
+            <a:ext cx="353880" cy="353880"/>
           </a:xfrm>
           <a:prstGeom prst="rect">
             <a:avLst/>
@@ -19280,7 +19777,7 @@
         </p:nvGraphicFramePr>
         <p:xfrm>
           <a:off x="360000" y="1229760"/>
-          <a:ext cx="5074920" cy="2920320"/>
+          <a:ext cx="5074560" cy="2919960"/>
         </p:xfrm>
         <a:graphic>
           <a:graphicData uri="http://schemas.openxmlformats.org/drawingml/2006/chart">
@@ -19297,7 +19794,7 @@
         <p:spPr>
           <a:xfrm>
             <a:off x="1078920" y="4288320"/>
-            <a:ext cx="158760" cy="122400"/>
+            <a:ext cx="158400" cy="122040"/>
           </a:xfrm>
           <a:prstGeom prst="roundRect">
             <a:avLst>
@@ -19345,7 +19842,7 @@
         <p:spPr>
           <a:xfrm>
             <a:off x="1280160" y="4260960"/>
-            <a:ext cx="1182960" cy="177120"/>
+            <a:ext cx="1182600" cy="176760"/>
           </a:xfrm>
           <a:prstGeom prst="rect">
             <a:avLst/>
@@ -19406,7 +19903,7 @@
         <p:spPr>
           <a:xfrm>
             <a:off x="2541960" y="4288320"/>
-            <a:ext cx="158760" cy="122400"/>
+            <a:ext cx="158400" cy="122040"/>
           </a:xfrm>
           <a:prstGeom prst="roundRect">
             <a:avLst>
@@ -19454,7 +19951,7 @@
         <p:spPr>
           <a:xfrm>
             <a:off x="2743200" y="4260960"/>
-            <a:ext cx="1365840" cy="177120"/>
+            <a:ext cx="1365480" cy="176760"/>
           </a:xfrm>
           <a:prstGeom prst="rect">
             <a:avLst/>
@@ -19515,7 +20012,7 @@
         <p:spPr>
           <a:xfrm>
             <a:off x="4187880" y="4288320"/>
-            <a:ext cx="158760" cy="122400"/>
+            <a:ext cx="158400" cy="122040"/>
           </a:xfrm>
           <a:prstGeom prst="roundRect">
             <a:avLst>
@@ -19563,7 +20060,7 @@
         <p:spPr>
           <a:xfrm>
             <a:off x="4389120" y="4260960"/>
-            <a:ext cx="1182960" cy="177120"/>
+            <a:ext cx="1182600" cy="176760"/>
           </a:xfrm>
           <a:prstGeom prst="rect">
             <a:avLst/>
@@ -19667,7 +20164,7 @@
         <p:spPr>
           <a:xfrm>
             <a:off x="598680" y="1247760"/>
-            <a:ext cx="354240" cy="354240"/>
+            <a:ext cx="353880" cy="353880"/>
           </a:xfrm>
           <a:prstGeom prst="rect">
             <a:avLst/>
@@ -19716,7 +20213,7 @@
         <p:spPr>
           <a:xfrm>
             <a:off x="761400" y="1468080"/>
-            <a:ext cx="174240" cy="94680"/>
+            <a:ext cx="173880" cy="94320"/>
           </a:xfrm>
           <a:prstGeom prst="rect">
             <a:avLst/>
@@ -19736,7 +20233,7 @@
         <p:spPr>
           <a:xfrm>
             <a:off x="4115160" y="1005840"/>
-            <a:ext cx="1185480" cy="136800"/>
+            <a:ext cx="1185120" cy="136800"/>
           </a:xfrm>
           <a:prstGeom prst="rect">
             <a:avLst/>
@@ -19794,7 +20291,7 @@
         <p:spPr>
           <a:xfrm>
             <a:off x="5669640" y="3665520"/>
-            <a:ext cx="3014280" cy="167040"/>
+            <a:ext cx="3013920" cy="167040"/>
           </a:xfrm>
           <a:prstGeom prst="rect">
             <a:avLst/>
@@ -20105,7 +20602,7 @@
         <p:spPr>
           <a:xfrm>
             <a:off x="457200" y="274320"/>
-            <a:ext cx="8223480" cy="633960"/>
+            <a:ext cx="8223120" cy="633600"/>
           </a:xfrm>
           <a:prstGeom prst="rect">
             <a:avLst/>
@@ -20178,7 +20675,7 @@
         <p:spPr>
           <a:xfrm>
             <a:off x="457200" y="1188720"/>
-            <a:ext cx="3925800" cy="2645640"/>
+            <a:ext cx="3925440" cy="2645280"/>
           </a:xfrm>
           <a:prstGeom prst="roundRect">
             <a:avLst>
@@ -20226,7 +20723,7 @@
         <p:spPr>
           <a:xfrm>
             <a:off x="640080" y="1325880"/>
-            <a:ext cx="2737080" cy="268200"/>
+            <a:ext cx="2736720" cy="267840"/>
           </a:xfrm>
           <a:prstGeom prst="rect">
             <a:avLst/>
@@ -20287,7 +20784,7 @@
         <p:spPr>
           <a:xfrm>
             <a:off x="640080" y="1645920"/>
-            <a:ext cx="3560040" cy="405360"/>
+            <a:ext cx="3559680" cy="405000"/>
           </a:xfrm>
           <a:prstGeom prst="rect">
             <a:avLst/>
@@ -20348,7 +20845,7 @@
         <p:spPr>
           <a:xfrm>
             <a:off x="640080" y="2240280"/>
-            <a:ext cx="3560040" cy="313920"/>
+            <a:ext cx="3559680" cy="313560"/>
           </a:xfrm>
           <a:prstGeom prst="rect">
             <a:avLst/>
@@ -20421,7 +20918,7 @@
         <p:spPr>
           <a:xfrm>
             <a:off x="640080" y="2606040"/>
-            <a:ext cx="3560040" cy="313920"/>
+            <a:ext cx="3559680" cy="313560"/>
           </a:xfrm>
           <a:prstGeom prst="rect">
             <a:avLst/>
@@ -20494,7 +20991,7 @@
         <p:spPr>
           <a:xfrm>
             <a:off x="640080" y="2971800"/>
-            <a:ext cx="3560040" cy="313920"/>
+            <a:ext cx="3559680" cy="313560"/>
           </a:xfrm>
           <a:prstGeom prst="rect">
             <a:avLst/>
@@ -20567,7 +21064,7 @@
         <p:spPr>
           <a:xfrm>
             <a:off x="4754880" y="1188720"/>
-            <a:ext cx="3925800" cy="2645640"/>
+            <a:ext cx="3925440" cy="2645280"/>
           </a:xfrm>
           <a:prstGeom prst="roundRect">
             <a:avLst>
@@ -20620,7 +21117,7 @@
         <p:spPr>
           <a:xfrm>
             <a:off x="4937760" y="1325880"/>
-            <a:ext cx="2737080" cy="268200"/>
+            <a:ext cx="2736720" cy="267840"/>
           </a:xfrm>
           <a:prstGeom prst="rect">
             <a:avLst/>
@@ -20681,7 +21178,7 @@
         <p:spPr>
           <a:xfrm>
             <a:off x="4937760" y="1645920"/>
-            <a:ext cx="3560040" cy="405360"/>
+            <a:ext cx="3559680" cy="405000"/>
           </a:xfrm>
           <a:prstGeom prst="rect">
             <a:avLst/>
@@ -20742,7 +21239,7 @@
         <p:spPr>
           <a:xfrm>
             <a:off x="4937760" y="2240280"/>
-            <a:ext cx="3560040" cy="313920"/>
+            <a:ext cx="3559680" cy="313560"/>
           </a:xfrm>
           <a:prstGeom prst="rect">
             <a:avLst/>
@@ -20815,7 +21312,7 @@
         <p:spPr>
           <a:xfrm>
             <a:off x="4937760" y="2606040"/>
-            <a:ext cx="3560040" cy="313920"/>
+            <a:ext cx="3559680" cy="313560"/>
           </a:xfrm>
           <a:prstGeom prst="rect">
             <a:avLst/>
@@ -20888,7 +21385,7 @@
         <p:spPr>
           <a:xfrm>
             <a:off x="4937760" y="2971800"/>
-            <a:ext cx="3560040" cy="313920"/>
+            <a:ext cx="3559680" cy="313560"/>
           </a:xfrm>
           <a:prstGeom prst="rect">
             <a:avLst/>
@@ -20961,7 +21458,7 @@
         <p:spPr>
           <a:xfrm>
             <a:off x="365760" y="4864680"/>
-            <a:ext cx="6851880" cy="222480"/>
+            <a:ext cx="6851520" cy="222120"/>
           </a:xfrm>
           <a:prstGeom prst="rect">
             <a:avLst/>
@@ -21022,7 +21519,7 @@
         <p:spPr>
           <a:xfrm>
             <a:off x="7772400" y="4864680"/>
-            <a:ext cx="999720" cy="222480"/>
+            <a:ext cx="999360" cy="222120"/>
           </a:xfrm>
           <a:prstGeom prst="rect">
             <a:avLst/>
@@ -21330,7 +21827,7 @@
         <p:spPr>
           <a:xfrm>
             <a:off x="457200" y="274320"/>
-            <a:ext cx="8223480" cy="633960"/>
+            <a:ext cx="8223120" cy="633600"/>
           </a:xfrm>
           <a:prstGeom prst="rect">
             <a:avLst/>
@@ -21391,7 +21888,7 @@
         <p:spPr>
           <a:xfrm>
             <a:off x="411480" y="1280160"/>
-            <a:ext cx="2645640" cy="2554200"/>
+            <a:ext cx="2645280" cy="2553840"/>
           </a:xfrm>
           <a:prstGeom prst="roundRect">
             <a:avLst>
@@ -21444,7 +21941,7 @@
         <p:spPr>
           <a:xfrm>
             <a:off x="411480" y="1280160"/>
-            <a:ext cx="66960" cy="2554200"/>
+            <a:ext cx="66600" cy="2553840"/>
           </a:xfrm>
           <a:prstGeom prst="roundRect">
             <a:avLst>
@@ -21497,7 +21994,7 @@
         <p:spPr>
           <a:xfrm>
             <a:off x="640080" y="1463040"/>
-            <a:ext cx="542520" cy="451080"/>
+            <a:ext cx="542160" cy="450720"/>
           </a:xfrm>
           <a:prstGeom prst="rect">
             <a:avLst/>
@@ -21558,7 +22055,7 @@
         <p:spPr>
           <a:xfrm>
             <a:off x="640080" y="2011680"/>
-            <a:ext cx="2279880" cy="359640"/>
+            <a:ext cx="2279520" cy="359280"/>
           </a:xfrm>
           <a:prstGeom prst="rect">
             <a:avLst/>
@@ -21619,7 +22116,7 @@
         <p:spPr>
           <a:xfrm>
             <a:off x="640080" y="2514600"/>
-            <a:ext cx="2279880" cy="1091160"/>
+            <a:ext cx="2279520" cy="1090800"/>
           </a:xfrm>
           <a:prstGeom prst="rect">
             <a:avLst/>
@@ -21686,7 +22183,7 @@
         <p:spPr>
           <a:xfrm>
             <a:off x="3246120" y="1280160"/>
-            <a:ext cx="2645640" cy="2554200"/>
+            <a:ext cx="2645280" cy="2553840"/>
           </a:xfrm>
           <a:prstGeom prst="roundRect">
             <a:avLst>
@@ -21739,7 +22236,7 @@
         <p:spPr>
           <a:xfrm>
             <a:off x="3246120" y="1280160"/>
-            <a:ext cx="66960" cy="2554200"/>
+            <a:ext cx="66600" cy="2553840"/>
           </a:xfrm>
           <a:prstGeom prst="roundRect">
             <a:avLst>
@@ -21792,7 +22289,7 @@
         <p:spPr>
           <a:xfrm>
             <a:off x="3474720" y="1463040"/>
-            <a:ext cx="542520" cy="451080"/>
+            <a:ext cx="542160" cy="450720"/>
           </a:xfrm>
           <a:prstGeom prst="rect">
             <a:avLst/>
@@ -21853,7 +22350,7 @@
         <p:spPr>
           <a:xfrm>
             <a:off x="3474720" y="2011680"/>
-            <a:ext cx="2279880" cy="359640"/>
+            <a:ext cx="2279520" cy="359280"/>
           </a:xfrm>
           <a:prstGeom prst="rect">
             <a:avLst/>
@@ -21914,7 +22411,7 @@
         <p:spPr>
           <a:xfrm>
             <a:off x="3474720" y="2514600"/>
-            <a:ext cx="2279880" cy="1091160"/>
+            <a:ext cx="2279520" cy="1090800"/>
           </a:xfrm>
           <a:prstGeom prst="rect">
             <a:avLst/>
@@ -21981,7 +22478,7 @@
         <p:spPr>
           <a:xfrm>
             <a:off x="6120000" y="1280160"/>
-            <a:ext cx="2645640" cy="2554200"/>
+            <a:ext cx="2645280" cy="2553840"/>
           </a:xfrm>
           <a:prstGeom prst="roundRect">
             <a:avLst>
@@ -22034,7 +22531,7 @@
         <p:spPr>
           <a:xfrm>
             <a:off x="6080760" y="1280160"/>
-            <a:ext cx="66960" cy="2554200"/>
+            <a:ext cx="66600" cy="2553840"/>
           </a:xfrm>
           <a:prstGeom prst="roundRect">
             <a:avLst>
@@ -22087,7 +22584,7 @@
         <p:spPr>
           <a:xfrm>
             <a:off x="6309360" y="1463040"/>
-            <a:ext cx="542520" cy="451080"/>
+            <a:ext cx="542160" cy="450720"/>
           </a:xfrm>
           <a:prstGeom prst="rect">
             <a:avLst/>
@@ -22136,7 +22633,7 @@
         <p:spPr>
           <a:xfrm>
             <a:off x="6309360" y="2011680"/>
-            <a:ext cx="2279880" cy="359640"/>
+            <a:ext cx="2279520" cy="359280"/>
           </a:xfrm>
           <a:prstGeom prst="rect">
             <a:avLst/>
@@ -22197,7 +22694,7 @@
         <p:spPr>
           <a:xfrm>
             <a:off x="6309360" y="2514600"/>
-            <a:ext cx="2279880" cy="1091160"/>
+            <a:ext cx="2279520" cy="1090800"/>
           </a:xfrm>
           <a:prstGeom prst="rect">
             <a:avLst/>
@@ -22258,7 +22755,7 @@
         <p:spPr>
           <a:xfrm>
             <a:off x="365760" y="4864680"/>
-            <a:ext cx="6851880" cy="222480"/>
+            <a:ext cx="6851520" cy="222120"/>
           </a:xfrm>
           <a:prstGeom prst="rect">
             <a:avLst/>
@@ -22319,7 +22816,7 @@
         <p:spPr>
           <a:xfrm>
             <a:off x="7772400" y="4864680"/>
-            <a:ext cx="999720" cy="222480"/>
+            <a:ext cx="999360" cy="222120"/>
           </a:xfrm>
           <a:prstGeom prst="rect">
             <a:avLst/>
@@ -22384,7 +22881,7 @@
         <p:spPr>
           <a:xfrm>
             <a:off x="6342840" y="1585080"/>
-            <a:ext cx="356760" cy="271080"/>
+            <a:ext cx="356400" cy="270720"/>
           </a:xfrm>
           <a:prstGeom prst="rect">
             <a:avLst/>
@@ -22957,7 +23454,7 @@
         <p:spPr>
           <a:xfrm>
             <a:off x="274320" y="201240"/>
-            <a:ext cx="8592480" cy="545760"/>
+            <a:ext cx="8592120" cy="545400"/>
           </a:xfrm>
           <a:prstGeom prst="rect">
             <a:avLst/>
@@ -23024,7 +23521,7 @@
         <p:spPr>
           <a:xfrm>
             <a:off x="274320" y="1104120"/>
-            <a:ext cx="2740320" cy="2997360"/>
+            <a:ext cx="2739960" cy="2997000"/>
           </a:xfrm>
           <a:prstGeom prst="rect">
             <a:avLst/>
@@ -23075,7 +23572,7 @@
         <p:spPr>
           <a:xfrm>
             <a:off x="274320" y="1104120"/>
-            <a:ext cx="2740320" cy="61200"/>
+            <a:ext cx="2739960" cy="60840"/>
           </a:xfrm>
           <a:prstGeom prst="rect">
             <a:avLst/>
@@ -23126,7 +23623,7 @@
         <p:spPr>
           <a:xfrm>
             <a:off x="475560" y="1268640"/>
-            <a:ext cx="2337840" cy="362880"/>
+            <a:ext cx="2337480" cy="362520"/>
           </a:xfrm>
           <a:prstGeom prst="rect">
             <a:avLst/>
@@ -23187,7 +23684,7 @@
         <p:spPr>
           <a:xfrm>
             <a:off x="475560" y="1671120"/>
-            <a:ext cx="2337840" cy="500040"/>
+            <a:ext cx="2337480" cy="499680"/>
           </a:xfrm>
           <a:prstGeom prst="rect">
             <a:avLst/>
@@ -23296,7 +23793,7 @@
         <p:spPr>
           <a:xfrm>
             <a:off x="475560" y="2402640"/>
-            <a:ext cx="2337840" cy="198360"/>
+            <a:ext cx="2337480" cy="198000"/>
           </a:xfrm>
           <a:prstGeom prst="rect">
             <a:avLst/>
@@ -23357,7 +23854,7 @@
         <p:spPr>
           <a:xfrm>
             <a:off x="475560" y="2612880"/>
-            <a:ext cx="2337840" cy="500040"/>
+            <a:ext cx="2337480" cy="499680"/>
           </a:xfrm>
           <a:prstGeom prst="rect">
             <a:avLst/>
@@ -23424,7 +23921,7 @@
         <p:spPr>
           <a:xfrm>
             <a:off x="475560" y="3291840"/>
-            <a:ext cx="2337840" cy="198360"/>
+            <a:ext cx="2337480" cy="198000"/>
           </a:xfrm>
           <a:prstGeom prst="rect">
             <a:avLst/>
@@ -23485,7 +23982,7 @@
         <p:spPr>
           <a:xfrm>
             <a:off x="475560" y="3520440"/>
-            <a:ext cx="289800" cy="106920"/>
+            <a:ext cx="289440" cy="106560"/>
           </a:xfrm>
           <a:prstGeom prst="rect">
             <a:avLst/>
@@ -23536,7 +24033,7 @@
         <p:spPr>
           <a:xfrm>
             <a:off x="841320" y="3520440"/>
-            <a:ext cx="289800" cy="106920"/>
+            <a:ext cx="289440" cy="106560"/>
           </a:xfrm>
           <a:prstGeom prst="rect">
             <a:avLst/>
@@ -23587,7 +24084,7 @@
         <p:spPr>
           <a:xfrm>
             <a:off x="1207080" y="3520440"/>
-            <a:ext cx="289800" cy="106920"/>
+            <a:ext cx="289440" cy="106560"/>
           </a:xfrm>
           <a:prstGeom prst="rect">
             <a:avLst/>
@@ -23638,7 +24135,7 @@
         <p:spPr>
           <a:xfrm>
             <a:off x="475560" y="3675960"/>
-            <a:ext cx="2337840" cy="225720"/>
+            <a:ext cx="2337480" cy="225360"/>
           </a:xfrm>
           <a:prstGeom prst="rect">
             <a:avLst/>
@@ -23699,7 +24196,7 @@
         <p:spPr>
           <a:xfrm>
             <a:off x="3200400" y="1104120"/>
-            <a:ext cx="2740320" cy="2997360"/>
+            <a:ext cx="2739960" cy="2997000"/>
           </a:xfrm>
           <a:prstGeom prst="rect">
             <a:avLst/>
@@ -23750,7 +24247,7 @@
         <p:spPr>
           <a:xfrm>
             <a:off x="3200400" y="1104120"/>
-            <a:ext cx="2740320" cy="61200"/>
+            <a:ext cx="2739960" cy="60840"/>
           </a:xfrm>
           <a:prstGeom prst="rect">
             <a:avLst/>
@@ -23801,7 +24298,7 @@
         <p:spPr>
           <a:xfrm>
             <a:off x="3401640" y="1268640"/>
-            <a:ext cx="2337840" cy="362880"/>
+            <a:ext cx="2337480" cy="362520"/>
           </a:xfrm>
           <a:prstGeom prst="rect">
             <a:avLst/>
@@ -23862,7 +24359,7 @@
         <p:spPr>
           <a:xfrm>
             <a:off x="3401640" y="1671120"/>
-            <a:ext cx="2337840" cy="500040"/>
+            <a:ext cx="2337480" cy="499680"/>
           </a:xfrm>
           <a:prstGeom prst="rect">
             <a:avLst/>
@@ -23971,7 +24468,7 @@
         <p:spPr>
           <a:xfrm>
             <a:off x="3401640" y="2402640"/>
-            <a:ext cx="2337840" cy="198360"/>
+            <a:ext cx="2337480" cy="198000"/>
           </a:xfrm>
           <a:prstGeom prst="rect">
             <a:avLst/>
@@ -24032,7 +24529,7 @@
         <p:spPr>
           <a:xfrm>
             <a:off x="3401640" y="2612880"/>
-            <a:ext cx="2337840" cy="500040"/>
+            <a:ext cx="2337480" cy="499680"/>
           </a:xfrm>
           <a:prstGeom prst="rect">
             <a:avLst/>
@@ -24093,7 +24590,7 @@
         <p:spPr>
           <a:xfrm>
             <a:off x="3401640" y="3291840"/>
-            <a:ext cx="2337840" cy="198360"/>
+            <a:ext cx="2337480" cy="198000"/>
           </a:xfrm>
           <a:prstGeom prst="rect">
             <a:avLst/>
@@ -24154,7 +24651,7 @@
         <p:spPr>
           <a:xfrm>
             <a:off x="3401640" y="3520440"/>
-            <a:ext cx="289800" cy="106920"/>
+            <a:ext cx="289440" cy="106560"/>
           </a:xfrm>
           <a:prstGeom prst="rect">
             <a:avLst/>
@@ -24205,7 +24702,7 @@
         <p:spPr>
           <a:xfrm>
             <a:off x="3767400" y="3520440"/>
-            <a:ext cx="289800" cy="106920"/>
+            <a:ext cx="289440" cy="106560"/>
           </a:xfrm>
           <a:prstGeom prst="rect">
             <a:avLst/>
@@ -24256,7 +24753,7 @@
         <p:spPr>
           <a:xfrm>
             <a:off x="4133160" y="3520440"/>
-            <a:ext cx="289800" cy="106920"/>
+            <a:ext cx="289440" cy="106560"/>
           </a:xfrm>
           <a:prstGeom prst="rect">
             <a:avLst/>
@@ -24307,7 +24804,7 @@
         <p:spPr>
           <a:xfrm>
             <a:off x="3401640" y="3675960"/>
-            <a:ext cx="2337840" cy="225720"/>
+            <a:ext cx="2337480" cy="225360"/>
           </a:xfrm>
           <a:prstGeom prst="rect">
             <a:avLst/>
@@ -24368,7 +24865,7 @@
         <p:spPr>
           <a:xfrm>
             <a:off x="6126480" y="1104120"/>
-            <a:ext cx="2740320" cy="2997360"/>
+            <a:ext cx="2739960" cy="2997000"/>
           </a:xfrm>
           <a:prstGeom prst="rect">
             <a:avLst/>
@@ -24420,7 +24917,7 @@
         <p:spPr>
           <a:xfrm>
             <a:off x="6327720" y="1268640"/>
-            <a:ext cx="2337840" cy="362880"/>
+            <a:ext cx="2337480" cy="362520"/>
           </a:xfrm>
           <a:prstGeom prst="rect">
             <a:avLst/>
@@ -24511,7 +25008,7 @@
         <p:spPr>
           <a:xfrm>
             <a:off x="6327720" y="1671120"/>
-            <a:ext cx="2337840" cy="500040"/>
+            <a:ext cx="2337480" cy="499680"/>
           </a:xfrm>
           <a:prstGeom prst="rect">
             <a:avLst/>
@@ -24620,7 +25117,7 @@
         <p:spPr>
           <a:xfrm>
             <a:off x="6327720" y="2402640"/>
-            <a:ext cx="2337840" cy="198360"/>
+            <a:ext cx="2337480" cy="198000"/>
           </a:xfrm>
           <a:prstGeom prst="rect">
             <a:avLst/>
@@ -24681,7 +25178,7 @@
         <p:spPr>
           <a:xfrm>
             <a:off x="6327720" y="2612880"/>
-            <a:ext cx="2337840" cy="500040"/>
+            <a:ext cx="2337480" cy="499680"/>
           </a:xfrm>
           <a:prstGeom prst="rect">
             <a:avLst/>
@@ -24742,7 +25239,7 @@
         <p:spPr>
           <a:xfrm>
             <a:off x="6327720" y="3291840"/>
-            <a:ext cx="2337840" cy="198360"/>
+            <a:ext cx="2337480" cy="198000"/>
           </a:xfrm>
           <a:prstGeom prst="rect">
             <a:avLst/>
@@ -24803,7 +25300,7 @@
         <p:spPr>
           <a:xfrm>
             <a:off x="6327720" y="3520440"/>
-            <a:ext cx="289800" cy="106920"/>
+            <a:ext cx="289440" cy="106560"/>
           </a:xfrm>
           <a:prstGeom prst="rect">
             <a:avLst/>
@@ -24854,7 +25351,7 @@
         <p:spPr>
           <a:xfrm>
             <a:off x="6693480" y="3520440"/>
-            <a:ext cx="289800" cy="106920"/>
+            <a:ext cx="289440" cy="106560"/>
           </a:xfrm>
           <a:prstGeom prst="rect">
             <a:avLst/>
@@ -24905,7 +25402,7 @@
         <p:spPr>
           <a:xfrm>
             <a:off x="7059240" y="3520440"/>
-            <a:ext cx="289800" cy="106920"/>
+            <a:ext cx="289440" cy="106560"/>
           </a:xfrm>
           <a:prstGeom prst="rect">
             <a:avLst/>
@@ -24956,7 +25453,7 @@
         <p:spPr>
           <a:xfrm>
             <a:off x="6327720" y="3675960"/>
-            <a:ext cx="2337840" cy="225720"/>
+            <a:ext cx="2337480" cy="225360"/>
           </a:xfrm>
           <a:prstGeom prst="rect">
             <a:avLst/>
@@ -25017,7 +25514,7 @@
         <p:spPr>
           <a:xfrm>
             <a:off x="7772400" y="4865040"/>
-            <a:ext cx="999720" cy="222480"/>
+            <a:ext cx="999360" cy="222120"/>
           </a:xfrm>
           <a:prstGeom prst="rect">
             <a:avLst/>
@@ -25078,7 +25575,7 @@
         <p:spPr>
           <a:xfrm>
             <a:off x="365760" y="4865040"/>
-            <a:ext cx="6851880" cy="222480"/>
+            <a:ext cx="6851520" cy="222120"/>
           </a:xfrm>
           <a:prstGeom prst="rect">
             <a:avLst/>
@@ -26205,7 +26702,7 @@
         <p:spPr>
           <a:xfrm>
             <a:off x="457200" y="274320"/>
-            <a:ext cx="8223480" cy="633960"/>
+            <a:ext cx="8223120" cy="633600"/>
           </a:xfrm>
           <a:prstGeom prst="rect">
             <a:avLst/>
@@ -26266,7 +26763,7 @@
         <p:spPr>
           <a:xfrm>
             <a:off x="457200" y="1188720"/>
-            <a:ext cx="816840" cy="908280"/>
+            <a:ext cx="816480" cy="907920"/>
           </a:xfrm>
           <a:prstGeom prst="roundRect">
             <a:avLst>
@@ -26319,7 +26816,7 @@
         <p:spPr>
           <a:xfrm>
             <a:off x="457200" y="1188720"/>
-            <a:ext cx="816840" cy="908280"/>
+            <a:ext cx="816480" cy="907920"/>
           </a:xfrm>
           <a:prstGeom prst="rect">
             <a:avLst/>
@@ -26380,7 +26877,7 @@
         <p:spPr>
           <a:xfrm>
             <a:off x="1371600" y="1188720"/>
-            <a:ext cx="7309080" cy="908280"/>
+            <a:ext cx="7308720" cy="907920"/>
           </a:xfrm>
           <a:prstGeom prst="roundRect">
             <a:avLst>
@@ -26433,7 +26930,7 @@
         <p:spPr>
           <a:xfrm>
             <a:off x="1554480" y="1280160"/>
-            <a:ext cx="6943320" cy="359640"/>
+            <a:ext cx="6942960" cy="359280"/>
           </a:xfrm>
           <a:prstGeom prst="rect">
             <a:avLst/>
@@ -26494,7 +26991,7 @@
         <p:spPr>
           <a:xfrm>
             <a:off x="1554480" y="1691640"/>
-            <a:ext cx="6943320" cy="313920"/>
+            <a:ext cx="6942960" cy="313560"/>
           </a:xfrm>
           <a:prstGeom prst="rect">
             <a:avLst/>
@@ -26567,7 +27064,7 @@
         <p:spPr>
           <a:xfrm>
             <a:off x="457200" y="2331720"/>
-            <a:ext cx="816840" cy="908280"/>
+            <a:ext cx="816480" cy="907920"/>
           </a:xfrm>
           <a:prstGeom prst="roundRect">
             <a:avLst>
@@ -26620,7 +27117,7 @@
         <p:spPr>
           <a:xfrm>
             <a:off x="457200" y="2331720"/>
-            <a:ext cx="816840" cy="908280"/>
+            <a:ext cx="816480" cy="907920"/>
           </a:xfrm>
           <a:prstGeom prst="rect">
             <a:avLst/>
@@ -26681,7 +27178,7 @@
         <p:spPr>
           <a:xfrm>
             <a:off x="1371600" y="2331720"/>
-            <a:ext cx="7309080" cy="908280"/>
+            <a:ext cx="7308720" cy="907920"/>
           </a:xfrm>
           <a:prstGeom prst="roundRect">
             <a:avLst>
@@ -26734,7 +27231,7 @@
         <p:spPr>
           <a:xfrm>
             <a:off x="1554480" y="2423160"/>
-            <a:ext cx="6943320" cy="359640"/>
+            <a:ext cx="6942960" cy="359280"/>
           </a:xfrm>
           <a:prstGeom prst="rect">
             <a:avLst/>
@@ -26795,7 +27292,7 @@
         <p:spPr>
           <a:xfrm>
             <a:off x="1554480" y="2834640"/>
-            <a:ext cx="6943320" cy="313920"/>
+            <a:ext cx="6942960" cy="313560"/>
           </a:xfrm>
           <a:prstGeom prst="rect">
             <a:avLst/>
@@ -26868,7 +27365,7 @@
         <p:spPr>
           <a:xfrm>
             <a:off x="457200" y="3474720"/>
-            <a:ext cx="816840" cy="908280"/>
+            <a:ext cx="816480" cy="907920"/>
           </a:xfrm>
           <a:prstGeom prst="roundRect">
             <a:avLst>
@@ -26921,7 +27418,7 @@
         <p:spPr>
           <a:xfrm>
             <a:off x="457200" y="3474720"/>
-            <a:ext cx="816840" cy="908280"/>
+            <a:ext cx="816480" cy="907920"/>
           </a:xfrm>
           <a:prstGeom prst="rect">
             <a:avLst/>
@@ -26982,7 +27479,7 @@
         <p:spPr>
           <a:xfrm>
             <a:off x="1371600" y="3474720"/>
-            <a:ext cx="7309080" cy="908280"/>
+            <a:ext cx="7308720" cy="907920"/>
           </a:xfrm>
           <a:prstGeom prst="roundRect">
             <a:avLst>
@@ -27035,7 +27532,7 @@
         <p:spPr>
           <a:xfrm>
             <a:off x="1554480" y="3566160"/>
-            <a:ext cx="6943320" cy="359640"/>
+            <a:ext cx="6942960" cy="359280"/>
           </a:xfrm>
           <a:prstGeom prst="rect">
             <a:avLst/>
@@ -27096,7 +27593,7 @@
         <p:spPr>
           <a:xfrm>
             <a:off x="1554480" y="3977640"/>
-            <a:ext cx="6943320" cy="313920"/>
+            <a:ext cx="6942960" cy="313560"/>
           </a:xfrm>
           <a:prstGeom prst="rect">
             <a:avLst/>
@@ -27169,7 +27666,7 @@
         <p:spPr>
           <a:xfrm>
             <a:off x="365760" y="4864680"/>
-            <a:ext cx="6851880" cy="222480"/>
+            <a:ext cx="6851520" cy="222120"/>
           </a:xfrm>
           <a:prstGeom prst="rect">
             <a:avLst/>
@@ -27230,7 +27727,7 @@
         <p:spPr>
           <a:xfrm>
             <a:off x="7772400" y="4864680"/>
-            <a:ext cx="999720" cy="222480"/>
+            <a:ext cx="999360" cy="222120"/>
           </a:xfrm>
           <a:prstGeom prst="rect">
             <a:avLst/>
@@ -27817,7 +28314,7 @@
         <p:spPr>
           <a:xfrm>
             <a:off x="6949440" y="2011680"/>
-            <a:ext cx="2371320" cy="359640"/>
+            <a:ext cx="2370960" cy="359280"/>
           </a:xfrm>
           <a:prstGeom prst="parallelogram">
             <a:avLst>
@@ -27865,7 +28362,7 @@
         <p:spPr>
           <a:xfrm>
             <a:off x="6400800" y="2560320"/>
-            <a:ext cx="2919960" cy="405360"/>
+            <a:ext cx="2919600" cy="405000"/>
           </a:xfrm>
           <a:prstGeom prst="parallelogram">
             <a:avLst>
@@ -27915,7 +28412,7 @@
         <p:spPr>
           <a:xfrm>
             <a:off x="457200" y="1371600"/>
-            <a:ext cx="7309080" cy="908280"/>
+            <a:ext cx="7308720" cy="907920"/>
           </a:xfrm>
           <a:prstGeom prst="rect">
             <a:avLst/>
@@ -27976,7 +28473,7 @@
         <p:spPr>
           <a:xfrm>
             <a:off x="457200" y="2286000"/>
-            <a:ext cx="7309080" cy="633960"/>
+            <a:ext cx="7308720" cy="633600"/>
           </a:xfrm>
           <a:prstGeom prst="rect">
             <a:avLst/>
@@ -28091,7 +28588,7 @@
         <p:spPr>
           <a:xfrm>
             <a:off x="457200" y="3931920"/>
-            <a:ext cx="5480280" cy="268200"/>
+            <a:ext cx="5479920" cy="267840"/>
           </a:xfrm>
           <a:prstGeom prst="rect">
             <a:avLst/>
@@ -28152,7 +28649,7 @@
         <p:spPr>
           <a:xfrm>
             <a:off x="457200" y="4251960"/>
-            <a:ext cx="6394680" cy="268200"/>
+            <a:ext cx="6394320" cy="267840"/>
           </a:xfrm>
           <a:prstGeom prst="rect">
             <a:avLst/>
@@ -28250,7 +28747,7 @@
         <p:spPr>
           <a:xfrm>
             <a:off x="457200" y="274320"/>
-            <a:ext cx="8223480" cy="633960"/>
+            <a:ext cx="8223120" cy="633600"/>
           </a:xfrm>
           <a:prstGeom prst="rect">
             <a:avLst/>
@@ -28311,7 +28808,7 @@
         <p:spPr>
           <a:xfrm>
             <a:off x="365760" y="1188720"/>
-            <a:ext cx="908280" cy="908280"/>
+            <a:ext cx="907920" cy="907920"/>
           </a:xfrm>
           <a:prstGeom prst="rect">
             <a:avLst/>
@@ -28372,7 +28869,7 @@
         <p:spPr>
           <a:xfrm>
             <a:off x="1371600" y="1188720"/>
-            <a:ext cx="7309080" cy="908280"/>
+            <a:ext cx="7308720" cy="907920"/>
           </a:xfrm>
           <a:prstGeom prst="rect">
             <a:avLst/>
@@ -28430,7 +28927,7 @@
         <p:spPr>
           <a:xfrm>
             <a:off x="365760" y="2286000"/>
-            <a:ext cx="908280" cy="908280"/>
+            <a:ext cx="907920" cy="907920"/>
           </a:xfrm>
           <a:prstGeom prst="rect">
             <a:avLst/>
@@ -28491,7 +28988,7 @@
         <p:spPr>
           <a:xfrm>
             <a:off x="1371600" y="2286000"/>
-            <a:ext cx="7309080" cy="908280"/>
+            <a:ext cx="7308720" cy="907920"/>
           </a:xfrm>
           <a:prstGeom prst="rect">
             <a:avLst/>
@@ -28561,7 +29058,7 @@
         <p:spPr>
           <a:xfrm>
             <a:off x="365760" y="3383280"/>
-            <a:ext cx="908280" cy="908280"/>
+            <a:ext cx="907920" cy="907920"/>
           </a:xfrm>
           <a:prstGeom prst="rect">
             <a:avLst/>
@@ -28622,7 +29119,7 @@
         <p:spPr>
           <a:xfrm>
             <a:off x="1371600" y="3383280"/>
-            <a:ext cx="7309080" cy="908280"/>
+            <a:ext cx="7308720" cy="907920"/>
           </a:xfrm>
           <a:prstGeom prst="rect">
             <a:avLst/>
@@ -28680,7 +29177,7 @@
         <p:spPr>
           <a:xfrm>
             <a:off x="365760" y="4864680"/>
-            <a:ext cx="6851880" cy="222480"/>
+            <a:ext cx="6851520" cy="222120"/>
           </a:xfrm>
           <a:prstGeom prst="rect">
             <a:avLst/>
@@ -28741,7 +29238,7 @@
         <p:spPr>
           <a:xfrm>
             <a:off x="7772400" y="4864680"/>
-            <a:ext cx="999720" cy="222480"/>
+            <a:ext cx="999360" cy="222120"/>
           </a:xfrm>
           <a:prstGeom prst="rect">
             <a:avLst/>
@@ -29085,7 +29582,7 @@
         <p:spPr>
           <a:xfrm>
             <a:off x="6400800" y="548640"/>
-            <a:ext cx="2371320" cy="313920"/>
+            <a:ext cx="2370960" cy="313560"/>
           </a:xfrm>
           <a:prstGeom prst="parallelogram">
             <a:avLst>
@@ -29133,7 +29630,7 @@
         <p:spPr>
           <a:xfrm>
             <a:off x="6583680" y="1005840"/>
-            <a:ext cx="2188440" cy="249840"/>
+            <a:ext cx="2188080" cy="249480"/>
           </a:xfrm>
           <a:prstGeom prst="parallelogram">
             <a:avLst>
@@ -29183,7 +29680,7 @@
         <p:spPr>
           <a:xfrm>
             <a:off x="457200" y="1645920"/>
-            <a:ext cx="8223480" cy="1639800"/>
+            <a:ext cx="8223120" cy="1639440"/>
           </a:xfrm>
           <a:prstGeom prst="rect">
             <a:avLst/>
@@ -29244,7 +29741,7 @@
         <p:spPr>
           <a:xfrm>
             <a:off x="457200" y="3749040"/>
-            <a:ext cx="8223480" cy="405360"/>
+            <a:ext cx="8223120" cy="405000"/>
           </a:xfrm>
           <a:prstGeom prst="rect">
             <a:avLst/>
@@ -29305,7 +29802,7 @@
         <p:spPr>
           <a:xfrm>
             <a:off x="365760" y="4864680"/>
-            <a:ext cx="6851880" cy="222480"/>
+            <a:ext cx="6851520" cy="222120"/>
           </a:xfrm>
           <a:prstGeom prst="rect">
             <a:avLst/>
@@ -29366,7 +29863,7 @@
         <p:spPr>
           <a:xfrm>
             <a:off x="7772400" y="4864680"/>
-            <a:ext cx="999720" cy="222480"/>
+            <a:ext cx="999360" cy="222120"/>
           </a:xfrm>
           <a:prstGeom prst="rect">
             <a:avLst/>
@@ -29464,7 +29961,7 @@
         <p:spPr>
           <a:xfrm>
             <a:off x="457200" y="925920"/>
-            <a:ext cx="6851880" cy="1639800"/>
+            <a:ext cx="6851520" cy="1639440"/>
           </a:xfrm>
           <a:prstGeom prst="rect">
             <a:avLst/>
@@ -29525,7 +30022,7 @@
         <p:spPr>
           <a:xfrm>
             <a:off x="457200" y="2571840"/>
-            <a:ext cx="6851880" cy="359640"/>
+            <a:ext cx="6851520" cy="359280"/>
           </a:xfrm>
           <a:prstGeom prst="rect">
             <a:avLst/>
@@ -29586,7 +30083,7 @@
         <p:spPr>
           <a:xfrm>
             <a:off x="457200" y="3303360"/>
-            <a:ext cx="8223480" cy="451080"/>
+            <a:ext cx="8223120" cy="450720"/>
           </a:xfrm>
           <a:prstGeom prst="rect">
             <a:avLst/>
@@ -29671,7 +30168,7 @@
         <p:spPr>
           <a:xfrm>
             <a:off x="457200" y="4526280"/>
-            <a:ext cx="8223480" cy="222480"/>
+            <a:ext cx="8223120" cy="222120"/>
           </a:xfrm>
           <a:prstGeom prst="rect">
             <a:avLst/>
@@ -29732,7 +30229,7 @@
         <p:spPr>
           <a:xfrm>
             <a:off x="365760" y="4864680"/>
-            <a:ext cx="6851880" cy="222480"/>
+            <a:ext cx="6851520" cy="222120"/>
           </a:xfrm>
           <a:prstGeom prst="rect">
             <a:avLst/>
@@ -29793,7 +30290,7 @@
         <p:spPr>
           <a:xfrm>
             <a:off x="7772400" y="4864680"/>
-            <a:ext cx="999720" cy="222480"/>
+            <a:ext cx="999360" cy="222120"/>
           </a:xfrm>
           <a:prstGeom prst="rect">
             <a:avLst/>
@@ -29891,7 +30388,7 @@
         <p:spPr>
           <a:xfrm>
             <a:off x="457200" y="274320"/>
-            <a:ext cx="8223480" cy="313920"/>
+            <a:ext cx="8223120" cy="313560"/>
           </a:xfrm>
           <a:prstGeom prst="rect">
             <a:avLst/>
@@ -29952,7 +30449,7 @@
         <p:spPr>
           <a:xfrm>
             <a:off x="457200" y="822960"/>
-            <a:ext cx="8223480" cy="1365480"/>
+            <a:ext cx="8223120" cy="1365120"/>
           </a:xfrm>
           <a:prstGeom prst="rect">
             <a:avLst/>
@@ -30073,7 +30570,7 @@
         <p:spPr>
           <a:xfrm>
             <a:off x="1490400" y="2743200"/>
-            <a:ext cx="579240" cy="579240"/>
+            <a:ext cx="578880" cy="578880"/>
           </a:xfrm>
           <a:prstGeom prst="rect">
             <a:avLst/>
@@ -30114,7 +30611,7 @@
         <p:spPr>
           <a:xfrm>
             <a:off x="502920" y="3474720"/>
-            <a:ext cx="2554200" cy="313920"/>
+            <a:ext cx="2553840" cy="313560"/>
           </a:xfrm>
           <a:prstGeom prst="rect">
             <a:avLst/>
@@ -30175,7 +30672,7 @@
         <p:spPr>
           <a:xfrm>
             <a:off x="502920" y="3794760"/>
-            <a:ext cx="2554200" cy="313920"/>
+            <a:ext cx="2553840" cy="313560"/>
           </a:xfrm>
           <a:prstGeom prst="rect">
             <a:avLst/>
@@ -30236,7 +30733,7 @@
         <p:spPr>
           <a:xfrm>
             <a:off x="3291840" y="3474720"/>
-            <a:ext cx="2554200" cy="313920"/>
+            <a:ext cx="2553840" cy="313560"/>
           </a:xfrm>
           <a:prstGeom prst="rect">
             <a:avLst/>
@@ -30297,7 +30794,7 @@
         <p:spPr>
           <a:xfrm>
             <a:off x="3291840" y="3794760"/>
-            <a:ext cx="2554200" cy="313920"/>
+            <a:ext cx="2553840" cy="313560"/>
           </a:xfrm>
           <a:prstGeom prst="rect">
             <a:avLst/>
@@ -30358,7 +30855,7 @@
         <p:spPr>
           <a:xfrm>
             <a:off x="6080760" y="3474720"/>
-            <a:ext cx="2554200" cy="313920"/>
+            <a:ext cx="2553840" cy="313560"/>
           </a:xfrm>
           <a:prstGeom prst="rect">
             <a:avLst/>
@@ -30419,7 +30916,7 @@
         <p:spPr>
           <a:xfrm>
             <a:off x="6080760" y="3794760"/>
-            <a:ext cx="2554200" cy="313920"/>
+            <a:ext cx="2553840" cy="313560"/>
           </a:xfrm>
           <a:prstGeom prst="rect">
             <a:avLst/>
@@ -30480,7 +30977,7 @@
         <p:spPr>
           <a:xfrm>
             <a:off x="365760" y="4864680"/>
-            <a:ext cx="6851880" cy="222480"/>
+            <a:ext cx="6851520" cy="222120"/>
           </a:xfrm>
           <a:prstGeom prst="rect">
             <a:avLst/>
@@ -30541,7 +31038,7 @@
         <p:spPr>
           <a:xfrm>
             <a:off x="7772400" y="4864680"/>
-            <a:ext cx="999720" cy="222480"/>
+            <a:ext cx="999360" cy="222120"/>
           </a:xfrm>
           <a:prstGeom prst="rect">
             <a:avLst/>
@@ -30606,7 +31103,7 @@
         <p:spPr>
           <a:xfrm>
             <a:off x="1483200" y="2759040"/>
-            <a:ext cx="586440" cy="585720"/>
+            <a:ext cx="586080" cy="585360"/>
           </a:xfrm>
           <a:prstGeom prst="rect">
             <a:avLst/>
@@ -30630,7 +31127,7 @@
         <p:spPr>
           <a:xfrm>
             <a:off x="4343760" y="2759040"/>
-            <a:ext cx="450000" cy="594720"/>
+            <a:ext cx="449640" cy="594360"/>
           </a:xfrm>
           <a:prstGeom prst="rect">
             <a:avLst/>
@@ -30654,7 +31151,7 @@
         <p:spPr>
           <a:xfrm>
             <a:off x="7048800" y="2759040"/>
-            <a:ext cx="606600" cy="606600"/>
+            <a:ext cx="606240" cy="606240"/>
           </a:xfrm>
           <a:prstGeom prst="rect">
             <a:avLst/>
@@ -30711,7 +31208,7 @@
         <p:spPr>
           <a:xfrm>
             <a:off x="452520" y="1626480"/>
-            <a:ext cx="1822680" cy="1456920"/>
+            <a:ext cx="1822320" cy="1456560"/>
           </a:xfrm>
           <a:prstGeom prst="roundRect">
             <a:avLst>
@@ -30764,7 +31261,7 @@
         <p:spPr>
           <a:xfrm>
             <a:off x="457200" y="274320"/>
-            <a:ext cx="8223480" cy="633960"/>
+            <a:ext cx="8223120" cy="633600"/>
           </a:xfrm>
           <a:prstGeom prst="rect">
             <a:avLst/>
@@ -30825,7 +31322,7 @@
         <p:spPr>
           <a:xfrm>
             <a:off x="589680" y="2175120"/>
-            <a:ext cx="1548360" cy="359640"/>
+            <a:ext cx="1548000" cy="359280"/>
           </a:xfrm>
           <a:prstGeom prst="rect">
             <a:avLst/>
@@ -30886,7 +31383,7 @@
         <p:spPr>
           <a:xfrm>
             <a:off x="2281320" y="2175120"/>
-            <a:ext cx="277200" cy="359640"/>
+            <a:ext cx="276840" cy="359280"/>
           </a:xfrm>
           <a:prstGeom prst="rect">
             <a:avLst/>
@@ -30947,7 +31444,7 @@
         <p:spPr>
           <a:xfrm>
             <a:off x="2583360" y="1626480"/>
-            <a:ext cx="1822680" cy="1456920"/>
+            <a:ext cx="1822320" cy="1456560"/>
           </a:xfrm>
           <a:prstGeom prst="roundRect">
             <a:avLst>
@@ -31000,7 +31497,7 @@
         <p:spPr>
           <a:xfrm>
             <a:off x="2715840" y="2175120"/>
-            <a:ext cx="1548360" cy="359640"/>
+            <a:ext cx="1548000" cy="359280"/>
           </a:xfrm>
           <a:prstGeom prst="rect">
             <a:avLst/>
@@ -31061,7 +31558,7 @@
         <p:spPr>
           <a:xfrm>
             <a:off x="4430160" y="2175120"/>
-            <a:ext cx="277200" cy="359640"/>
+            <a:ext cx="276840" cy="359280"/>
           </a:xfrm>
           <a:prstGeom prst="rect">
             <a:avLst/>
@@ -31122,7 +31619,7 @@
         <p:spPr>
           <a:xfrm>
             <a:off x="4732200" y="1626480"/>
-            <a:ext cx="1822680" cy="1456920"/>
+            <a:ext cx="1822320" cy="1456560"/>
           </a:xfrm>
           <a:prstGeom prst="roundRect">
             <a:avLst>
@@ -31175,7 +31672,7 @@
         <p:spPr>
           <a:xfrm>
             <a:off x="4869360" y="2175120"/>
-            <a:ext cx="1548360" cy="359640"/>
+            <a:ext cx="1548000" cy="359280"/>
           </a:xfrm>
           <a:prstGeom prst="rect">
             <a:avLst/>
@@ -31236,7 +31733,7 @@
         <p:spPr>
           <a:xfrm>
             <a:off x="6579000" y="2175120"/>
-            <a:ext cx="277200" cy="359640"/>
+            <a:ext cx="276840" cy="359280"/>
           </a:xfrm>
           <a:prstGeom prst="rect">
             <a:avLst/>
@@ -31297,7 +31794,7 @@
         <p:spPr>
           <a:xfrm>
             <a:off x="6881040" y="1626480"/>
-            <a:ext cx="1822680" cy="1456920"/>
+            <a:ext cx="1822320" cy="1456560"/>
           </a:xfrm>
           <a:prstGeom prst="roundRect">
             <a:avLst>
@@ -31350,7 +31847,7 @@
         <p:spPr>
           <a:xfrm>
             <a:off x="6995160" y="2178360"/>
-            <a:ext cx="1548360" cy="359640"/>
+            <a:ext cx="1548000" cy="359280"/>
           </a:xfrm>
           <a:prstGeom prst="rect">
             <a:avLst/>
@@ -31411,7 +31908,7 @@
         <p:spPr>
           <a:xfrm>
             <a:off x="434520" y="3226680"/>
-            <a:ext cx="1822680" cy="268200"/>
+            <a:ext cx="1822320" cy="267840"/>
           </a:xfrm>
           <a:prstGeom prst="rect">
             <a:avLst/>
@@ -31472,7 +31969,7 @@
         <p:spPr>
           <a:xfrm>
             <a:off x="2583360" y="3226680"/>
-            <a:ext cx="1822680" cy="268200"/>
+            <a:ext cx="1822320" cy="267840"/>
           </a:xfrm>
           <a:prstGeom prst="rect">
             <a:avLst/>
@@ -31533,7 +32030,7 @@
         <p:spPr>
           <a:xfrm>
             <a:off x="4732200" y="3226680"/>
-            <a:ext cx="1822680" cy="268200"/>
+            <a:ext cx="1822320" cy="267840"/>
           </a:xfrm>
           <a:prstGeom prst="rect">
             <a:avLst/>
@@ -31594,7 +32091,7 @@
         <p:spPr>
           <a:xfrm>
             <a:off x="6881040" y="3226680"/>
-            <a:ext cx="1822680" cy="268200"/>
+            <a:ext cx="1822320" cy="267840"/>
           </a:xfrm>
           <a:prstGeom prst="rect">
             <a:avLst/>
@@ -31655,7 +32152,7 @@
         <p:spPr>
           <a:xfrm>
             <a:off x="365760" y="4864680"/>
-            <a:ext cx="6851880" cy="222480"/>
+            <a:ext cx="6851520" cy="222120"/>
           </a:xfrm>
           <a:prstGeom prst="rect">
             <a:avLst/>
@@ -31716,7 +32213,7 @@
         <p:spPr>
           <a:xfrm>
             <a:off x="7772400" y="4864680"/>
-            <a:ext cx="999720" cy="222480"/>
+            <a:ext cx="999360" cy="222120"/>
           </a:xfrm>
           <a:prstGeom prst="rect">
             <a:avLst/>
@@ -32321,7 +32818,7 @@
         <p:spPr>
           <a:xfrm>
             <a:off x="457200" y="274320"/>
-            <a:ext cx="8223480" cy="633960"/>
+            <a:ext cx="8223120" cy="633600"/>
           </a:xfrm>
           <a:prstGeom prst="rect">
             <a:avLst/>
@@ -32382,7 +32879,7 @@
         <p:spPr>
           <a:xfrm>
             <a:off x="457200" y="1280160"/>
-            <a:ext cx="3925800" cy="313920"/>
+            <a:ext cx="3925440" cy="313560"/>
           </a:xfrm>
           <a:prstGeom prst="rect">
             <a:avLst/>
@@ -33013,7 +33510,7 @@
         <p:spPr>
           <a:xfrm>
             <a:off x="4754880" y="1280160"/>
-            <a:ext cx="3925800" cy="313920"/>
+            <a:ext cx="3925440" cy="313560"/>
           </a:xfrm>
           <a:prstGeom prst="rect">
             <a:avLst/>
@@ -33774,7 +34271,7 @@
         <p:spPr>
           <a:xfrm>
             <a:off x="457200" y="3291840"/>
-            <a:ext cx="8223480" cy="313920"/>
+            <a:ext cx="8223120" cy="313560"/>
           </a:xfrm>
           <a:prstGeom prst="rect">
             <a:avLst/>
@@ -33835,7 +34332,7 @@
         <p:spPr>
           <a:xfrm>
             <a:off x="411480" y="3703320"/>
-            <a:ext cx="1548360" cy="816840"/>
+            <a:ext cx="1548000" cy="816480"/>
           </a:xfrm>
           <a:prstGeom prst="roundRect">
             <a:avLst>
@@ -33888,7 +34385,7 @@
         <p:spPr>
           <a:xfrm>
             <a:off x="502920" y="3960000"/>
-            <a:ext cx="1365480" cy="313920"/>
+            <a:ext cx="1365120" cy="313560"/>
           </a:xfrm>
           <a:prstGeom prst="rect">
             <a:avLst/>
@@ -33949,7 +34446,7 @@
         <p:spPr>
           <a:xfrm>
             <a:off x="2103120" y="3703320"/>
-            <a:ext cx="1548360" cy="816840"/>
+            <a:ext cx="1548000" cy="816480"/>
           </a:xfrm>
           <a:prstGeom prst="roundRect">
             <a:avLst>
@@ -34002,7 +34499,7 @@
         <p:spPr>
           <a:xfrm>
             <a:off x="2194560" y="3954960"/>
-            <a:ext cx="1365480" cy="313920"/>
+            <a:ext cx="1365120" cy="313560"/>
           </a:xfrm>
           <a:prstGeom prst="rect">
             <a:avLst/>
@@ -34063,7 +34560,7 @@
         <p:spPr>
           <a:xfrm>
             <a:off x="3794760" y="3703320"/>
-            <a:ext cx="1548360" cy="816840"/>
+            <a:ext cx="1548000" cy="816480"/>
           </a:xfrm>
           <a:prstGeom prst="roundRect">
             <a:avLst>
@@ -34116,7 +34613,7 @@
         <p:spPr>
           <a:xfrm>
             <a:off x="3886200" y="3954960"/>
-            <a:ext cx="1365480" cy="313920"/>
+            <a:ext cx="1365120" cy="313560"/>
           </a:xfrm>
           <a:prstGeom prst="rect">
             <a:avLst/>
@@ -34177,7 +34674,7 @@
         <p:spPr>
           <a:xfrm>
             <a:off x="5486400" y="3703320"/>
-            <a:ext cx="1548360" cy="816840"/>
+            <a:ext cx="1548000" cy="816480"/>
           </a:xfrm>
           <a:prstGeom prst="roundRect">
             <a:avLst>
@@ -34230,7 +34727,7 @@
         <p:spPr>
           <a:xfrm>
             <a:off x="5578200" y="3954960"/>
-            <a:ext cx="1365480" cy="313920"/>
+            <a:ext cx="1365120" cy="313560"/>
           </a:xfrm>
           <a:prstGeom prst="rect">
             <a:avLst/>
@@ -34291,7 +34788,7 @@
         <p:spPr>
           <a:xfrm>
             <a:off x="7178040" y="3703320"/>
-            <a:ext cx="1548360" cy="816840"/>
+            <a:ext cx="1548000" cy="816480"/>
           </a:xfrm>
           <a:prstGeom prst="roundRect">
             <a:avLst>
@@ -34344,7 +34841,7 @@
         <p:spPr>
           <a:xfrm>
             <a:off x="7269480" y="3960000"/>
-            <a:ext cx="1365480" cy="313920"/>
+            <a:ext cx="1365120" cy="313560"/>
           </a:xfrm>
           <a:prstGeom prst="rect">
             <a:avLst/>
@@ -34405,7 +34902,7 @@
         <p:spPr>
           <a:xfrm>
             <a:off x="365760" y="4864680"/>
-            <a:ext cx="6851880" cy="222480"/>
+            <a:ext cx="6851520" cy="222120"/>
           </a:xfrm>
           <a:prstGeom prst="rect">
             <a:avLst/>
@@ -34466,7 +34963,7 @@
         <p:spPr>
           <a:xfrm>
             <a:off x="7772400" y="4864680"/>
-            <a:ext cx="999720" cy="222480"/>
+            <a:ext cx="999360" cy="222120"/>
           </a:xfrm>
           <a:prstGeom prst="rect">
             <a:avLst/>
@@ -34531,7 +35028,7 @@
         <p:spPr>
           <a:xfrm>
             <a:off x="2933280" y="2022480"/>
-            <a:ext cx="174240" cy="94680"/>
+            <a:ext cx="173880" cy="94320"/>
           </a:xfrm>
           <a:prstGeom prst="rect">
             <a:avLst/>
@@ -34555,7 +35052,7 @@
         <p:spPr>
           <a:xfrm>
             <a:off x="2933280" y="2311560"/>
-            <a:ext cx="174240" cy="94680"/>
+            <a:ext cx="173880" cy="94320"/>
           </a:xfrm>
           <a:prstGeom prst="rect">
             <a:avLst/>
@@ -34579,7 +35076,7 @@
         <p:spPr>
           <a:xfrm>
             <a:off x="7217280" y="2023920"/>
-            <a:ext cx="174240" cy="94680"/>
+            <a:ext cx="173880" cy="94320"/>
           </a:xfrm>
           <a:prstGeom prst="rect">
             <a:avLst/>
@@ -34981,7 +35478,7 @@
         <p:spPr>
           <a:xfrm>
             <a:off x="457200" y="274320"/>
-            <a:ext cx="8223480" cy="633960"/>
+            <a:ext cx="8223120" cy="633600"/>
           </a:xfrm>
           <a:prstGeom prst="rect">
             <a:avLst/>
@@ -35042,7 +35539,7 @@
         <p:spPr>
           <a:xfrm>
             <a:off x="457200" y="1491120"/>
-            <a:ext cx="3925800" cy="2462760"/>
+            <a:ext cx="3925440" cy="2462400"/>
           </a:xfrm>
           <a:prstGeom prst="roundRect">
             <a:avLst>
@@ -35090,7 +35587,7 @@
         <p:spPr>
           <a:xfrm>
             <a:off x="640080" y="1628280"/>
-            <a:ext cx="3560040" cy="313920"/>
+            <a:ext cx="3559680" cy="313560"/>
           </a:xfrm>
           <a:prstGeom prst="rect">
             <a:avLst/>
@@ -35151,7 +35648,7 @@
         <p:spPr>
           <a:xfrm>
             <a:off x="685800" y="2131200"/>
-            <a:ext cx="3377160" cy="1639800"/>
+            <a:ext cx="3376800" cy="1639440"/>
           </a:xfrm>
           <a:prstGeom prst="rect">
             <a:avLst/>
@@ -35323,7 +35820,7 @@
         <p:spPr>
           <a:xfrm>
             <a:off x="4754880" y="1491120"/>
-            <a:ext cx="3925800" cy="2462760"/>
+            <a:ext cx="3925440" cy="2462400"/>
           </a:xfrm>
           <a:prstGeom prst="roundRect">
             <a:avLst>
@@ -35376,7 +35873,7 @@
         <p:spPr>
           <a:xfrm>
             <a:off x="4937760" y="1628280"/>
-            <a:ext cx="3560040" cy="313920"/>
+            <a:ext cx="3559680" cy="313560"/>
           </a:xfrm>
           <a:prstGeom prst="rect">
             <a:avLst/>
@@ -35437,7 +35934,7 @@
         <p:spPr>
           <a:xfrm>
             <a:off x="4983480" y="2131200"/>
-            <a:ext cx="3377160" cy="1639800"/>
+            <a:ext cx="3376800" cy="1639440"/>
           </a:xfrm>
           <a:prstGeom prst="rect">
             <a:avLst/>
@@ -35624,7 +36121,7 @@
         <p:spPr>
           <a:xfrm>
             <a:off x="365760" y="4864680"/>
-            <a:ext cx="6851880" cy="222480"/>
+            <a:ext cx="6851520" cy="222120"/>
           </a:xfrm>
           <a:prstGeom prst="rect">
             <a:avLst/>
@@ -35685,7 +36182,7 @@
         <p:spPr>
           <a:xfrm>
             <a:off x="7772400" y="4864680"/>
-            <a:ext cx="999720" cy="222480"/>
+            <a:ext cx="999360" cy="222120"/>
           </a:xfrm>
           <a:prstGeom prst="rect">
             <a:avLst/>
@@ -35912,7 +36409,7 @@
         <p:spPr>
           <a:xfrm>
             <a:off x="457200" y="274320"/>
-            <a:ext cx="8223480" cy="633960"/>
+            <a:ext cx="8223120" cy="633600"/>
           </a:xfrm>
           <a:prstGeom prst="rect">
             <a:avLst/>
@@ -35973,7 +36470,7 @@
         <p:spPr>
           <a:xfrm>
             <a:off x="457200" y="1188720"/>
-            <a:ext cx="8223480" cy="771120"/>
+            <a:ext cx="8223120" cy="770760"/>
           </a:xfrm>
           <a:prstGeom prst="roundRect">
             <a:avLst>
@@ -36028,7 +36525,7 @@
         <p:spPr>
           <a:xfrm>
             <a:off x="640080" y="1188720"/>
-            <a:ext cx="1639800" cy="771120"/>
+            <a:ext cx="1639440" cy="770760"/>
           </a:xfrm>
           <a:prstGeom prst="rect">
             <a:avLst/>
@@ -36137,7 +36634,7 @@
         <p:spPr>
           <a:xfrm>
             <a:off x="2651760" y="1188720"/>
-            <a:ext cx="2005560" cy="771120"/>
+            <a:ext cx="2005200" cy="770760"/>
           </a:xfrm>
           <a:prstGeom prst="rect">
             <a:avLst/>
@@ -36198,7 +36695,7 @@
         <p:spPr>
           <a:xfrm>
             <a:off x="4663440" y="1188720"/>
-            <a:ext cx="2005560" cy="771120"/>
+            <a:ext cx="2005200" cy="770760"/>
           </a:xfrm>
           <a:prstGeom prst="rect">
             <a:avLst/>
@@ -36259,7 +36756,7 @@
         <p:spPr>
           <a:xfrm>
             <a:off x="6675120" y="1188720"/>
-            <a:ext cx="2005560" cy="771120"/>
+            <a:ext cx="2005200" cy="770760"/>
           </a:xfrm>
           <a:prstGeom prst="rect">
             <a:avLst/>
@@ -36320,7 +36817,7 @@
         <p:spPr>
           <a:xfrm>
             <a:off x="457200" y="2103120"/>
-            <a:ext cx="8223480" cy="771120"/>
+            <a:ext cx="8223120" cy="770760"/>
           </a:xfrm>
           <a:prstGeom prst="roundRect">
             <a:avLst>
@@ -36375,7 +36872,7 @@
         <p:spPr>
           <a:xfrm>
             <a:off x="640080" y="2103120"/>
-            <a:ext cx="1639800" cy="771120"/>
+            <a:ext cx="1639440" cy="770760"/>
           </a:xfrm>
           <a:prstGeom prst="rect">
             <a:avLst/>
@@ -36484,7 +36981,7 @@
         <p:spPr>
           <a:xfrm>
             <a:off x="2651760" y="2103120"/>
-            <a:ext cx="2005560" cy="771120"/>
+            <a:ext cx="2005200" cy="770760"/>
           </a:xfrm>
           <a:prstGeom prst="rect">
             <a:avLst/>
@@ -36545,7 +37042,7 @@
         <p:spPr>
           <a:xfrm>
             <a:off x="4663440" y="2103120"/>
-            <a:ext cx="2005560" cy="771120"/>
+            <a:ext cx="2005200" cy="770760"/>
           </a:xfrm>
           <a:prstGeom prst="rect">
             <a:avLst/>
@@ -36606,7 +37103,7 @@
         <p:spPr>
           <a:xfrm>
             <a:off x="6675120" y="2103120"/>
-            <a:ext cx="2005560" cy="771120"/>
+            <a:ext cx="2005200" cy="770760"/>
           </a:xfrm>
           <a:prstGeom prst="rect">
             <a:avLst/>
@@ -36667,7 +37164,7 @@
         <p:spPr>
           <a:xfrm>
             <a:off x="457200" y="3017520"/>
-            <a:ext cx="8223480" cy="771120"/>
+            <a:ext cx="8223120" cy="770760"/>
           </a:xfrm>
           <a:prstGeom prst="roundRect">
             <a:avLst>
@@ -36722,7 +37219,7 @@
         <p:spPr>
           <a:xfrm>
             <a:off x="640080" y="3017520"/>
-            <a:ext cx="1639800" cy="771120"/>
+            <a:ext cx="1639440" cy="770760"/>
           </a:xfrm>
           <a:prstGeom prst="rect">
             <a:avLst/>
@@ -36831,7 +37328,7 @@
         <p:spPr>
           <a:xfrm>
             <a:off x="2651760" y="3017520"/>
-            <a:ext cx="2005560" cy="771120"/>
+            <a:ext cx="2005200" cy="770760"/>
           </a:xfrm>
           <a:prstGeom prst="rect">
             <a:avLst/>
@@ -36892,7 +37389,7 @@
         <p:spPr>
           <a:xfrm>
             <a:off x="4663440" y="3017520"/>
-            <a:ext cx="2005560" cy="771120"/>
+            <a:ext cx="2005200" cy="770760"/>
           </a:xfrm>
           <a:prstGeom prst="rect">
             <a:avLst/>
@@ -36953,7 +37450,7 @@
         <p:spPr>
           <a:xfrm>
             <a:off x="6675120" y="3017520"/>
-            <a:ext cx="2005560" cy="771120"/>
+            <a:ext cx="2005200" cy="770760"/>
           </a:xfrm>
           <a:prstGeom prst="rect">
             <a:avLst/>
@@ -37014,7 +37511,7 @@
         <p:spPr>
           <a:xfrm>
             <a:off x="457200" y="3931920"/>
-            <a:ext cx="8223480" cy="771120"/>
+            <a:ext cx="8223120" cy="770760"/>
           </a:xfrm>
           <a:prstGeom prst="roundRect">
             <a:avLst>
@@ -37069,7 +37566,7 @@
         <p:spPr>
           <a:xfrm>
             <a:off x="640080" y="3931920"/>
-            <a:ext cx="1639800" cy="771120"/>
+            <a:ext cx="1639440" cy="770760"/>
           </a:xfrm>
           <a:prstGeom prst="rect">
             <a:avLst/>
@@ -37178,7 +37675,7 @@
         <p:spPr>
           <a:xfrm>
             <a:off x="2651760" y="3931920"/>
-            <a:ext cx="3011400" cy="771120"/>
+            <a:ext cx="3011040" cy="770760"/>
           </a:xfrm>
           <a:prstGeom prst="rect">
             <a:avLst/>
@@ -37239,7 +37736,7 @@
         <p:spPr>
           <a:xfrm>
             <a:off x="4663080" y="3931920"/>
-            <a:ext cx="3011400" cy="771120"/>
+            <a:ext cx="3011040" cy="770760"/>
           </a:xfrm>
           <a:prstGeom prst="rect">
             <a:avLst/>
@@ -37300,7 +37797,7 @@
         <p:spPr>
           <a:xfrm>
             <a:off x="365760" y="4864680"/>
-            <a:ext cx="6851880" cy="222480"/>
+            <a:ext cx="6851520" cy="222120"/>
           </a:xfrm>
           <a:prstGeom prst="rect">
             <a:avLst/>
@@ -37361,7 +37858,7 @@
         <p:spPr>
           <a:xfrm>
             <a:off x="7772400" y="4864680"/>
-            <a:ext cx="999720" cy="222480"/>
+            <a:ext cx="999360" cy="222120"/>
           </a:xfrm>
           <a:prstGeom prst="rect">
             <a:avLst/>
@@ -38182,7 +38679,7 @@
         <p:spPr>
           <a:xfrm>
             <a:off x="457200" y="274320"/>
-            <a:ext cx="8223480" cy="633960"/>
+            <a:ext cx="8223120" cy="633600"/>
           </a:xfrm>
           <a:prstGeom prst="rect">
             <a:avLst/>
@@ -38243,7 +38740,7 @@
         <p:spPr>
           <a:xfrm>
             <a:off x="411480" y="1280160"/>
-            <a:ext cx="2645640" cy="2554200"/>
+            <a:ext cx="2645280" cy="2553840"/>
           </a:xfrm>
           <a:prstGeom prst="roundRect">
             <a:avLst>
@@ -38296,7 +38793,7 @@
         <p:spPr>
           <a:xfrm>
             <a:off x="411480" y="1280160"/>
-            <a:ext cx="2645640" cy="103680"/>
+            <a:ext cx="2645280" cy="103320"/>
           </a:xfrm>
           <a:prstGeom prst="roundRect">
             <a:avLst>
@@ -38349,7 +38846,7 @@
         <p:spPr>
           <a:xfrm>
             <a:off x="411480" y="1508760"/>
-            <a:ext cx="2645640" cy="451080"/>
+            <a:ext cx="2645280" cy="450720"/>
           </a:xfrm>
           <a:prstGeom prst="rect">
             <a:avLst/>
@@ -38410,7 +38907,7 @@
         <p:spPr>
           <a:xfrm>
             <a:off x="411480" y="2011680"/>
-            <a:ext cx="2645640" cy="359640"/>
+            <a:ext cx="2645280" cy="359280"/>
           </a:xfrm>
           <a:prstGeom prst="rect">
             <a:avLst/>
@@ -38471,7 +38968,7 @@
         <p:spPr>
           <a:xfrm>
             <a:off x="411480" y="2423160"/>
-            <a:ext cx="2645640" cy="268200"/>
+            <a:ext cx="2645280" cy="267840"/>
           </a:xfrm>
           <a:prstGeom prst="rect">
             <a:avLst/>
@@ -38532,7 +39029,7 @@
         <p:spPr>
           <a:xfrm>
             <a:off x="548640" y="2926080"/>
-            <a:ext cx="2371320" cy="268200"/>
+            <a:ext cx="2370960" cy="267840"/>
           </a:xfrm>
           <a:prstGeom prst="rect">
             <a:avLst/>
@@ -38593,7 +39090,7 @@
         <p:spPr>
           <a:xfrm>
             <a:off x="3246120" y="1280160"/>
-            <a:ext cx="2645640" cy="2554200"/>
+            <a:ext cx="2645280" cy="2553840"/>
           </a:xfrm>
           <a:prstGeom prst="roundRect">
             <a:avLst>
@@ -38646,7 +39143,7 @@
         <p:spPr>
           <a:xfrm>
             <a:off x="3246120" y="1280160"/>
-            <a:ext cx="2645640" cy="103680"/>
+            <a:ext cx="2645280" cy="103320"/>
           </a:xfrm>
           <a:prstGeom prst="roundRect">
             <a:avLst>
@@ -38699,7 +39196,7 @@
         <p:spPr>
           <a:xfrm>
             <a:off x="3246120" y="1508760"/>
-            <a:ext cx="2645640" cy="451080"/>
+            <a:ext cx="2645280" cy="450720"/>
           </a:xfrm>
           <a:prstGeom prst="rect">
             <a:avLst/>
@@ -38760,7 +39257,7 @@
         <p:spPr>
           <a:xfrm>
             <a:off x="3246120" y="2011680"/>
-            <a:ext cx="2645640" cy="359640"/>
+            <a:ext cx="2645280" cy="359280"/>
           </a:xfrm>
           <a:prstGeom prst="rect">
             <a:avLst/>
@@ -38821,7 +39318,7 @@
         <p:spPr>
           <a:xfrm>
             <a:off x="3246120" y="2423160"/>
-            <a:ext cx="2645640" cy="268200"/>
+            <a:ext cx="2645280" cy="267840"/>
           </a:xfrm>
           <a:prstGeom prst="rect">
             <a:avLst/>
@@ -38882,7 +39379,7 @@
         <p:spPr>
           <a:xfrm>
             <a:off x="3383280" y="2926080"/>
-            <a:ext cx="2371320" cy="268200"/>
+            <a:ext cx="2370960" cy="267840"/>
           </a:xfrm>
           <a:prstGeom prst="rect">
             <a:avLst/>
@@ -38943,7 +39440,7 @@
         <p:spPr>
           <a:xfrm>
             <a:off x="6080760" y="1280160"/>
-            <a:ext cx="2645640" cy="2554200"/>
+            <a:ext cx="2645280" cy="2553840"/>
           </a:xfrm>
           <a:prstGeom prst="roundRect">
             <a:avLst>
@@ -38996,7 +39493,7 @@
         <p:spPr>
           <a:xfrm>
             <a:off x="6080760" y="1280160"/>
-            <a:ext cx="2645640" cy="103680"/>
+            <a:ext cx="2645280" cy="103320"/>
           </a:xfrm>
           <a:prstGeom prst="roundRect">
             <a:avLst>
@@ -39049,7 +39546,7 @@
         <p:spPr>
           <a:xfrm>
             <a:off x="6080760" y="1508760"/>
-            <a:ext cx="2645640" cy="451080"/>
+            <a:ext cx="2645280" cy="450720"/>
           </a:xfrm>
           <a:prstGeom prst="rect">
             <a:avLst/>
@@ -39110,7 +39607,7 @@
         <p:spPr>
           <a:xfrm>
             <a:off x="6080760" y="2011680"/>
-            <a:ext cx="2645640" cy="359640"/>
+            <a:ext cx="2645280" cy="359280"/>
           </a:xfrm>
           <a:prstGeom prst="rect">
             <a:avLst/>
@@ -39171,7 +39668,7 @@
         <p:spPr>
           <a:xfrm>
             <a:off x="6080760" y="2423160"/>
-            <a:ext cx="2645640" cy="268200"/>
+            <a:ext cx="2645280" cy="267840"/>
           </a:xfrm>
           <a:prstGeom prst="rect">
             <a:avLst/>
@@ -39232,7 +39729,7 @@
         <p:spPr>
           <a:xfrm>
             <a:off x="6217920" y="2926080"/>
-            <a:ext cx="2371320" cy="268200"/>
+            <a:ext cx="2370960" cy="267840"/>
           </a:xfrm>
           <a:prstGeom prst="rect">
             <a:avLst/>
@@ -39293,7 +39790,7 @@
         <p:spPr>
           <a:xfrm>
             <a:off x="457200" y="4114800"/>
-            <a:ext cx="8223480" cy="496800"/>
+            <a:ext cx="8223120" cy="496440"/>
           </a:xfrm>
           <a:prstGeom prst="roundRect">
             <a:avLst>
@@ -39346,7 +39843,7 @@
         <p:spPr>
           <a:xfrm>
             <a:off x="594360" y="4160520"/>
-            <a:ext cx="7949160" cy="405360"/>
+            <a:ext cx="7948800" cy="405000"/>
           </a:xfrm>
           <a:prstGeom prst="rect">
             <a:avLst/>
@@ -39455,7 +39952,7 @@
         <p:spPr>
           <a:xfrm>
             <a:off x="365760" y="4864680"/>
-            <a:ext cx="6851880" cy="222480"/>
+            <a:ext cx="6851520" cy="222120"/>
           </a:xfrm>
           <a:prstGeom prst="rect">
             <a:avLst/>
@@ -39516,7 +40013,7 @@
         <p:spPr>
           <a:xfrm>
             <a:off x="7772400" y="4864680"/>
-            <a:ext cx="999720" cy="222480"/>
+            <a:ext cx="999360" cy="222120"/>
           </a:xfrm>
           <a:prstGeom prst="rect">
             <a:avLst/>
@@ -40435,7 +40932,7 @@
 </a:theme>
 </file>
 
-<file path=ppt/theme/theme4.xml><?xml version="1.0" encoding="utf-8"?>
+<file path=ppt/theme/theme5.xml><?xml version="1.0" encoding="utf-8"?>
 <a:theme xmlns:a="http://schemas.openxmlformats.org/drawingml/2006/main" xmlns:r="http://schemas.openxmlformats.org/officeDocument/2006/relationships" name="Office Theme">
   <a:themeElements>
     <a:clrScheme name="LibreOffice">
